--- a/dist/초1/수학/수와연산/초1_수학_수와연산_04_덧셈의뜻.pptx
+++ b/dist/초1/수학/수와연산/초1_수학_수와연산_04_덧셈의뜻.pptx
@@ -120,13 +120,13 @@
   <p:extLst>
     <p:ext uri="{521415D9-36F7-43E2-AB2F-B90AF26B5E84}">
       <p14:sectionLst xmlns:p14="http://schemas.microsoft.com/office/powerpoint/2010/main">
-        <p14:section name="도입" id="{cf95a73a-4a9f-d4f7-7091-ea9329f4e2cb}">
+        <p14:section name="도입" id="{9841aa6b-1349-daf8-07e0-25e7dc58b7c4}">
           <p14:sldIdLst>
             <p14:sldId id="256"/>
             <p14:sldId id="257"/>
           </p14:sldIdLst>
         </p14:section>
-        <p14:section name="개념" id="{c8344c3b-9b43-af2a-a6c5-7d29f3e7a448}">
+        <p14:section name="개념" id="{0d5b4c4d-1798-c851-240d-40cdfdc0c135}">
           <p14:sldIdLst>
             <p14:sldId id="258"/>
             <p14:sldId id="259"/>
@@ -134,26 +134,26 @@
             <p14:sldId id="261"/>
           </p14:sldIdLst>
         </p14:section>
-        <p14:section name="연습" id="{ecfe6f6c-d580-2405-c0e9-b59b615b2753}">
+        <p14:section name="연습" id="{9b58a8ff-d892-46dd-0182-1cb0434dadb6}">
           <p14:sldIdLst>
             <p14:sldId id="262"/>
             <p14:sldId id="263"/>
             <p14:sldId id="264"/>
           </p14:sldIdLst>
         </p14:section>
-        <p14:section name="확인" id="{61f8c9d7-8d27-eb6c-e947-2397231718cb}">
+        <p14:section name="확인" id="{4edadbbd-d611-0a8c-7786-f170a3c9bb74}">
           <p14:sldIdLst>
             <p14:sldId id="265"/>
             <p14:sldId id="266"/>
             <p14:sldId id="267"/>
           </p14:sldIdLst>
         </p14:section>
-        <p14:section name="정리" id="{ee90892c-d1ab-ea43-c43a-3a905461b5b2}">
+        <p14:section name="정리" id="{32475620-7fa8-9545-1576-a392b21073b4}">
           <p14:sldIdLst>
             <p14:sldId id="268"/>
           </p14:sldIdLst>
         </p14:section>
-        <p14:section name="보충" id="{b78ce246-1e7e-dc28-8134-6db4712b1dd1}">
+        <p14:section name="보충" id="{4c6a921b-4e78-cd77-69ed-321cc23d6c36}">
           <p14:sldIdLst>
             <p14:sldId id="269"/>
           </p14:sldIdLst>
@@ -2958,7 +2958,7 @@
           <a:bodyPr wrap="square" lIns="0" tIns="0" rIns="0" bIns="0" rtlCol="0" anchor="ctr"/>
           <a:lstStyle/>
           <a:p>
-            <a:pPr algn="l" indent="0" marL="0">
+            <a:pPr eaLnBrk="0" algn="l" indent="0" marL="0">
               <a:buNone/>
             </a:pPr>
             <a:r>
@@ -2999,7 +2999,7 @@
           <a:bodyPr wrap="square" lIns="0" tIns="0" rIns="0" bIns="0" rtlCol="0" anchor="t"/>
           <a:lstStyle/>
           <a:p>
-            <a:pPr indent="0" marL="0">
+            <a:pPr eaLnBrk="0" indent="0" marL="0">
               <a:buNone/>
             </a:pPr>
             <a:r>
@@ -3248,7 +3248,7 @@
           <a:bodyPr wrap="square" lIns="0" tIns="0" rIns="0" bIns="0" rtlCol="0" anchor="ctr"/>
           <a:lstStyle/>
           <a:p>
-            <a:pPr indent="0" marL="0">
+            <a:pPr eaLnBrk="0" indent="0" marL="0">
               <a:spcAft>
                 <a:spcPts val="600"/>
               </a:spcAft>
@@ -3268,7 +3268,7 @@
             <a:endParaRPr lang="ko-KR" sz="3200" dirty="0"/>
           </a:p>
           <a:p>
-            <a:pPr indent="0" marL="0">
+            <a:pPr eaLnBrk="0" indent="0" marL="0">
               <a:spcAft>
                 <a:spcPts val="600"/>
               </a:spcAft>
@@ -3288,7 +3288,7 @@
             <a:endParaRPr lang="ko-KR" sz="3200" dirty="0"/>
           </a:p>
           <a:p>
-            <a:pPr indent="0" marL="0">
+            <a:pPr eaLnBrk="0" indent="0" marL="0">
               <a:spcAft>
                 <a:spcPts val="600"/>
               </a:spcAft>
@@ -3357,7 +3357,7 @@
           <a:bodyPr wrap="square" lIns="0" tIns="0" rIns="0" bIns="0" rtlCol="0" anchor="ctr"/>
           <a:lstStyle/>
           <a:p>
-            <a:pPr algn="l" indent="0" marL="0">
+            <a:pPr eaLnBrk="0" algn="l" indent="0" marL="0">
               <a:buNone/>
             </a:pPr>
             <a:r>
@@ -3396,7 +3396,7 @@
           <a:bodyPr wrap="square" lIns="0" tIns="0" rIns="0" bIns="0" rtlCol="0" anchor="ctr"/>
           <a:lstStyle/>
           <a:p>
-            <a:pPr algn="l" indent="0" marL="0">
+            <a:pPr eaLnBrk="0" algn="l" indent="0" marL="0">
               <a:buNone/>
             </a:pPr>
             <a:r>
@@ -3443,7 +3443,7 @@
           <a:bodyPr wrap="square" lIns="0" tIns="0" rIns="0" bIns="0" rtlCol="0" anchor="ctr"/>
           <a:lstStyle/>
           <a:p>
-            <a:pPr algn="ctr" indent="0" marL="0">
+            <a:pPr eaLnBrk="0" algn="ctr" indent="0" marL="0">
               <a:buNone/>
             </a:pPr>
             <a:r>
@@ -3482,7 +3482,7 @@
           <a:bodyPr wrap="square" lIns="0" tIns="0" rIns="0" bIns="0" rtlCol="0" anchor="ctr"/>
           <a:lstStyle/>
           <a:p>
-            <a:pPr algn="l" indent="0" marL="0">
+            <a:pPr eaLnBrk="0" algn="l" indent="0" marL="0">
               <a:buNone/>
             </a:pPr>
             <a:r>
@@ -3529,7 +3529,7 @@
           <a:bodyPr wrap="square" lIns="0" tIns="0" rIns="0" bIns="0" rtlCol="0" anchor="ctr"/>
           <a:lstStyle/>
           <a:p>
-            <a:pPr algn="ctr" indent="0" marL="0">
+            <a:pPr eaLnBrk="0" algn="ctr" indent="0" marL="0">
               <a:buNone/>
             </a:pPr>
             <a:r>
@@ -3568,7 +3568,7 @@
           <a:bodyPr wrap="square" lIns="0" tIns="0" rIns="0" bIns="0" rtlCol="0" anchor="ctr"/>
           <a:lstStyle/>
           <a:p>
-            <a:pPr algn="l" indent="0" marL="0">
+            <a:pPr eaLnBrk="0" algn="l" indent="0" marL="0">
               <a:buNone/>
             </a:pPr>
             <a:r>
@@ -3615,7 +3615,7 @@
           <a:bodyPr wrap="square" lIns="0" tIns="0" rIns="0" bIns="0" rtlCol="0" anchor="ctr"/>
           <a:lstStyle/>
           <a:p>
-            <a:pPr algn="ctr" indent="0" marL="0">
+            <a:pPr eaLnBrk="0" algn="ctr" indent="0" marL="0">
               <a:buNone/>
             </a:pPr>
             <a:r>
@@ -3654,7 +3654,7 @@
           <a:bodyPr wrap="square" lIns="0" tIns="0" rIns="0" bIns="0" rtlCol="0" anchor="ctr"/>
           <a:lstStyle/>
           <a:p>
-            <a:pPr algn="l" indent="0" marL="0">
+            <a:pPr eaLnBrk="0" algn="l" indent="0" marL="0">
               <a:buNone/>
             </a:pPr>
             <a:r>
@@ -3711,7 +3711,7 @@
             </a:lvl1pPr>
           </a:lstStyle>
           <a:p>
-            <a:pPr algn="r"/>
+            <a:pPr eaLnBrk="0" algn="r"/>
             <a:fld id="{F7021451-1387-4CA6-816F-3879F97B5CBC}" type="slidenum">
               <a:rPr b="0" lang="en-US"/>
               <a:t>10</a:t>
@@ -3768,7 +3768,7 @@
           <a:bodyPr wrap="square" lIns="0" tIns="0" rIns="0" bIns="0" rtlCol="0" anchor="ctr"/>
           <a:lstStyle/>
           <a:p>
-            <a:pPr algn="l" indent="0" marL="0">
+            <a:pPr eaLnBrk="0" algn="l" indent="0" marL="0">
               <a:buNone/>
             </a:pPr>
             <a:r>
@@ -3834,7 +3834,7 @@
           <a:bodyPr wrap="square" lIns="0" tIns="0" rIns="0" bIns="0" rtlCol="0" anchor="ctr"/>
           <a:lstStyle/>
           <a:p>
-            <a:pPr indent="0" marL="0">
+            <a:pPr eaLnBrk="0" indent="0" marL="0">
               <a:spcAft>
                 <a:spcPts val="600"/>
               </a:spcAft>
@@ -3884,7 +3884,7 @@
           <a:bodyPr wrap="square" lIns="177800" tIns="0" rIns="177800" bIns="0" rtlCol="0" anchor="ctr"/>
           <a:lstStyle/>
           <a:p>
-            <a:pPr algn="l" indent="0" marL="0">
+            <a:pPr eaLnBrk="0" algn="l" indent="0" marL="0">
               <a:buNone/>
             </a:pPr>
             <a:r>
@@ -3923,7 +3923,7 @@
           <a:bodyPr wrap="square" lIns="0" tIns="0" rIns="0" bIns="0" rtlCol="0" anchor="ctr"/>
           <a:lstStyle/>
           <a:p>
-            <a:pPr algn="l" indent="0" marL="0">
+            <a:pPr eaLnBrk="0" algn="l" indent="0" marL="0">
               <a:buNone/>
             </a:pPr>
             <a:r>
@@ -3962,7 +3962,7 @@
           <a:bodyPr wrap="square" lIns="0" tIns="0" rIns="0" bIns="0" rtlCol="0" anchor="ctr"/>
           <a:lstStyle/>
           <a:p>
-            <a:pPr algn="l" indent="0" marL="0">
+            <a:pPr eaLnBrk="0" algn="l" indent="0" marL="0">
               <a:buNone/>
             </a:pPr>
             <a:r>
@@ -4001,7 +4001,7 @@
           <a:bodyPr wrap="square" lIns="0" tIns="0" rIns="0" bIns="0" rtlCol="0" anchor="ctr"/>
           <a:lstStyle/>
           <a:p>
-            <a:pPr algn="l" indent="0" marL="0">
+            <a:pPr eaLnBrk="0" algn="l" indent="0" marL="0">
               <a:buNone/>
             </a:pPr>
             <a:r>
@@ -4040,7 +4040,7 @@
           <a:bodyPr wrap="square" lIns="0" tIns="0" rIns="0" bIns="0" rtlCol="0" anchor="ctr"/>
           <a:lstStyle/>
           <a:p>
-            <a:pPr algn="l" indent="0" marL="0">
+            <a:pPr eaLnBrk="0" algn="l" indent="0" marL="0">
               <a:buNone/>
             </a:pPr>
             <a:r>
@@ -4079,7 +4079,7 @@
           <a:bodyPr wrap="square" lIns="0" tIns="0" rIns="0" bIns="0" rtlCol="0" anchor="ctr"/>
           <a:lstStyle/>
           <a:p>
-            <a:pPr algn="l" indent="0" marL="0">
+            <a:pPr eaLnBrk="0" algn="l" indent="0" marL="0">
               <a:buNone/>
             </a:pPr>
             <a:r>
@@ -4118,7 +4118,7 @@
           <a:bodyPr wrap="square" lIns="0" tIns="0" rIns="0" bIns="0" rtlCol="0" anchor="ctr"/>
           <a:lstStyle/>
           <a:p>
-            <a:pPr algn="l" indent="0" marL="0">
+            <a:pPr eaLnBrk="0" algn="l" indent="0" marL="0">
               <a:buNone/>
             </a:pPr>
             <a:r>
@@ -4165,7 +4165,7 @@
           <a:bodyPr wrap="square" lIns="177800" tIns="0" rIns="177800" bIns="0" rtlCol="0" anchor="ctr"/>
           <a:lstStyle/>
           <a:p>
-            <a:pPr algn="l" indent="0" marL="0">
+            <a:pPr eaLnBrk="0" algn="l" indent="0" marL="0">
               <a:buNone/>
             </a:pPr>
             <a:r>
@@ -4204,7 +4204,7 @@
           <a:bodyPr wrap="square" lIns="0" tIns="0" rIns="0" bIns="0" rtlCol="0" anchor="ctr"/>
           <a:lstStyle/>
           <a:p>
-            <a:pPr algn="l" indent="0" marL="0">
+            <a:pPr eaLnBrk="0" algn="l" indent="0" marL="0">
               <a:buNone/>
             </a:pPr>
             <a:r>
@@ -4243,7 +4243,7 @@
           <a:bodyPr wrap="square" lIns="0" tIns="0" rIns="0" bIns="0" rtlCol="0" anchor="ctr"/>
           <a:lstStyle/>
           <a:p>
-            <a:pPr algn="l" indent="0" marL="0">
+            <a:pPr eaLnBrk="0" algn="l" indent="0" marL="0">
               <a:buNone/>
             </a:pPr>
             <a:r>
@@ -4282,7 +4282,7 @@
           <a:bodyPr wrap="square" lIns="0" tIns="0" rIns="0" bIns="0" rtlCol="0" anchor="ctr"/>
           <a:lstStyle/>
           <a:p>
-            <a:pPr algn="l" indent="0" marL="0">
+            <a:pPr eaLnBrk="0" algn="l" indent="0" marL="0">
               <a:buNone/>
             </a:pPr>
             <a:r>
@@ -4321,7 +4321,7 @@
           <a:bodyPr wrap="square" lIns="0" tIns="0" rIns="0" bIns="0" rtlCol="0" anchor="ctr"/>
           <a:lstStyle/>
           <a:p>
-            <a:pPr algn="l" indent="0" marL="0">
+            <a:pPr eaLnBrk="0" algn="l" indent="0" marL="0">
               <a:buNone/>
             </a:pPr>
             <a:r>
@@ -4378,7 +4378,7 @@
             </a:lvl1pPr>
           </a:lstStyle>
           <a:p>
-            <a:pPr algn="r"/>
+            <a:pPr eaLnBrk="0" algn="r"/>
             <a:fld id="{F7021451-1387-4CA6-816F-3879F97B5CBC}" type="slidenum">
               <a:rPr b="0" lang="en-US"/>
               <a:t>11</a:t>
@@ -4435,7 +4435,7 @@
           <a:bodyPr wrap="square" lIns="0" tIns="0" rIns="0" bIns="0" rtlCol="0" anchor="ctr"/>
           <a:lstStyle/>
           <a:p>
-            <a:pPr algn="l" indent="0" marL="0">
+            <a:pPr eaLnBrk="0" algn="l" indent="0" marL="0">
               <a:buNone/>
             </a:pPr>
             <a:r>
@@ -4474,7 +4474,7 @@
           <a:bodyPr wrap="square" lIns="0" tIns="0" rIns="0" bIns="0" rtlCol="0" anchor="ctr"/>
           <a:lstStyle/>
           <a:p>
-            <a:pPr algn="l" indent="0" marL="0">
+            <a:pPr eaLnBrk="0" algn="l" indent="0" marL="0">
               <a:buNone/>
             </a:pPr>
             <a:r>
@@ -4540,7 +4540,7 @@
           <a:bodyPr wrap="square" lIns="0" tIns="0" rIns="0" bIns="0" rtlCol="0" anchor="ctr"/>
           <a:lstStyle/>
           <a:p>
-            <a:pPr indent="0" marL="0">
+            <a:pPr eaLnBrk="0" indent="0" marL="0">
               <a:spcAft>
                 <a:spcPts val="600"/>
               </a:spcAft>
@@ -4590,7 +4590,7 @@
           <a:bodyPr wrap="square" lIns="0" tIns="0" rIns="0" bIns="0" rtlCol="0" anchor="ctr"/>
           <a:lstStyle/>
           <a:p>
-            <a:pPr algn="ctr" indent="0" marL="0">
+            <a:pPr eaLnBrk="0" algn="ctr" indent="0" marL="0">
               <a:buNone/>
             </a:pPr>
             <a:r>
@@ -4656,7 +4656,7 @@
           <a:bodyPr wrap="square" lIns="0" tIns="0" rIns="0" bIns="0" rtlCol="0" anchor="ctr"/>
           <a:lstStyle/>
           <a:p>
-            <a:pPr indent="0" marL="0">
+            <a:pPr eaLnBrk="0" indent="0" marL="0">
               <a:spcAft>
                 <a:spcPts val="600"/>
               </a:spcAft>
@@ -4706,7 +4706,7 @@
           <a:bodyPr wrap="square" lIns="0" tIns="0" rIns="0" bIns="0" rtlCol="0" anchor="ctr"/>
           <a:lstStyle/>
           <a:p>
-            <a:pPr algn="ctr" indent="0" marL="0">
+            <a:pPr eaLnBrk="0" algn="ctr" indent="0" marL="0">
               <a:buNone/>
             </a:pPr>
             <a:r>
@@ -4772,7 +4772,7 @@
           <a:bodyPr wrap="square" lIns="0" tIns="0" rIns="0" bIns="0" rtlCol="0" anchor="ctr"/>
           <a:lstStyle/>
           <a:p>
-            <a:pPr indent="0" marL="0">
+            <a:pPr eaLnBrk="0" indent="0" marL="0">
               <a:spcAft>
                 <a:spcPts val="600"/>
               </a:spcAft>
@@ -4822,7 +4822,7 @@
           <a:bodyPr wrap="square" lIns="0" tIns="0" rIns="0" bIns="0" rtlCol="0" anchor="ctr"/>
           <a:lstStyle/>
           <a:p>
-            <a:pPr algn="ctr" indent="0" marL="0">
+            <a:pPr eaLnBrk="0" algn="ctr" indent="0" marL="0">
               <a:buNone/>
             </a:pPr>
             <a:r>
@@ -4888,7 +4888,7 @@
           <a:bodyPr wrap="square" lIns="0" tIns="0" rIns="0" bIns="0" rtlCol="0" anchor="ctr"/>
           <a:lstStyle/>
           <a:p>
-            <a:pPr indent="0" marL="0">
+            <a:pPr eaLnBrk="0" indent="0" marL="0">
               <a:spcAft>
                 <a:spcPts val="600"/>
               </a:spcAft>
@@ -4948,7 +4948,7 @@
             </a:lvl1pPr>
           </a:lstStyle>
           <a:p>
-            <a:pPr algn="r"/>
+            <a:pPr eaLnBrk="0" algn="r"/>
             <a:fld id="{F7021451-1387-4CA6-816F-3879F97B5CBC}" type="slidenum">
               <a:rPr b="0" lang="en-US"/>
               <a:t>12</a:t>
@@ -5005,7 +5005,7 @@
           <a:bodyPr wrap="square" lIns="0" tIns="0" rIns="0" bIns="0" rtlCol="0" anchor="ctr"/>
           <a:lstStyle/>
           <a:p>
-            <a:pPr algn="l" indent="0" marL="0">
+            <a:pPr eaLnBrk="0" algn="l" indent="0" marL="0">
               <a:buNone/>
             </a:pPr>
             <a:r>
@@ -5071,7 +5071,7 @@
           <a:bodyPr wrap="square" lIns="0" tIns="0" rIns="0" bIns="0" rtlCol="0" anchor="ctr"/>
           <a:lstStyle/>
           <a:p>
-            <a:pPr indent="0" marL="0">
+            <a:pPr eaLnBrk="0" indent="0" marL="0">
               <a:spcAft>
                 <a:spcPts val="600"/>
               </a:spcAft>
@@ -5121,7 +5121,7 @@
           <a:bodyPr wrap="square" lIns="177800" tIns="0" rIns="177800" bIns="0" rtlCol="0" anchor="ctr"/>
           <a:lstStyle/>
           <a:p>
-            <a:pPr algn="l" indent="0" marL="0">
+            <a:pPr eaLnBrk="0" algn="l" indent="0" marL="0">
               <a:buNone/>
             </a:pPr>
             <a:r>
@@ -5168,7 +5168,7 @@
           <a:bodyPr wrap="square" lIns="177800" tIns="0" rIns="177800" bIns="0" rtlCol="0" anchor="ctr"/>
           <a:lstStyle/>
           <a:p>
-            <a:pPr algn="l" indent="0" marL="0">
+            <a:pPr eaLnBrk="0" algn="l" indent="0" marL="0">
               <a:buNone/>
             </a:pPr>
             <a:r>
@@ -5207,7 +5207,7 @@
           <a:bodyPr wrap="square" lIns="0" tIns="0" rIns="0" bIns="0" rtlCol="0" anchor="t"/>
           <a:lstStyle/>
           <a:p>
-            <a:pPr algn="l" indent="0" marL="0">
+            <a:pPr eaLnBrk="0" algn="l" indent="0" marL="0">
               <a:buNone/>
             </a:pPr>
             <a:r>
@@ -5246,7 +5246,7 @@
           <a:bodyPr wrap="square" lIns="0" tIns="0" rIns="0" bIns="0" rtlCol="0" anchor="ctr"/>
           <a:lstStyle/>
           <a:p>
-            <a:pPr algn="l" indent="0" marL="0">
+            <a:pPr eaLnBrk="0" algn="l" indent="0" marL="0">
               <a:buNone/>
             </a:pPr>
             <a:r>
@@ -5285,7 +5285,7 @@
           <a:bodyPr wrap="square" lIns="0" tIns="0" rIns="0" bIns="0" rtlCol="0" anchor="ctr"/>
           <a:lstStyle/>
           <a:p>
-            <a:pPr algn="l" indent="0" marL="0">
+            <a:pPr eaLnBrk="0" algn="l" indent="0" marL="0">
               <a:buNone/>
             </a:pPr>
             <a:r>
@@ -5324,7 +5324,7 @@
           <a:bodyPr wrap="square" lIns="0" tIns="0" rIns="0" bIns="0" rtlCol="0" anchor="ctr"/>
           <a:lstStyle/>
           <a:p>
-            <a:pPr algn="l" indent="0" marL="0">
+            <a:pPr eaLnBrk="0" algn="l" indent="0" marL="0">
               <a:buNone/>
             </a:pPr>
             <a:r>
@@ -5363,7 +5363,7 @@
           <a:bodyPr wrap="square" lIns="0" tIns="0" rIns="0" bIns="0" rtlCol="0" anchor="ctr"/>
           <a:lstStyle/>
           <a:p>
-            <a:pPr algn="l" indent="0" marL="0">
+            <a:pPr eaLnBrk="0" algn="l" indent="0" marL="0">
               <a:buNone/>
             </a:pPr>
             <a:r>
@@ -5420,7 +5420,7 @@
             </a:lvl1pPr>
           </a:lstStyle>
           <a:p>
-            <a:pPr algn="r"/>
+            <a:pPr eaLnBrk="0" algn="r"/>
             <a:fld id="{F7021451-1387-4CA6-816F-3879F97B5CBC}" type="slidenum">
               <a:rPr b="0" lang="en-US"/>
               <a:t>13</a:t>
@@ -5477,7 +5477,7 @@
           <a:bodyPr wrap="square" lIns="0" tIns="0" rIns="0" bIns="0" rtlCol="0" anchor="ctr"/>
           <a:lstStyle/>
           <a:p>
-            <a:pPr algn="l" indent="0" marL="0">
+            <a:pPr eaLnBrk="0" algn="l" indent="0" marL="0">
               <a:buNone/>
             </a:pPr>
             <a:r>
@@ -5516,7 +5516,7 @@
           <a:bodyPr wrap="square" lIns="0" tIns="0" rIns="0" bIns="0" rtlCol="0" anchor="ctr"/>
           <a:lstStyle/>
           <a:p>
-            <a:pPr algn="l" indent="0" marL="0">
+            <a:pPr eaLnBrk="0" algn="l" indent="0" marL="0">
               <a:buNone/>
             </a:pPr>
             <a:r>
@@ -5582,7 +5582,7 @@
           <a:bodyPr wrap="square" lIns="0" tIns="0" rIns="0" bIns="0" rtlCol="0" anchor="ctr"/>
           <a:lstStyle/>
           <a:p>
-            <a:pPr indent="0" marL="0">
+            <a:pPr eaLnBrk="0" indent="0" marL="0">
               <a:spcAft>
                 <a:spcPts val="600"/>
               </a:spcAft>
@@ -5728,7 +5728,7 @@
           <a:bodyPr wrap="square" lIns="0" tIns="0" rIns="0" bIns="0" rtlCol="0" anchor="ctr"/>
           <a:lstStyle/>
           <a:p>
-            <a:pPr algn="ctr" indent="0" marL="0">
+            <a:pPr eaLnBrk="0" algn="ctr" indent="0" marL="0">
               <a:buNone/>
             </a:pPr>
             <a:r>
@@ -5871,7 +5871,7 @@
           <a:bodyPr wrap="square" lIns="0" tIns="0" rIns="0" bIns="0" rtlCol="0" anchor="ctr"/>
           <a:lstStyle/>
           <a:p>
-            <a:pPr algn="ctr" indent="0" marL="0">
+            <a:pPr eaLnBrk="0" algn="ctr" indent="0" marL="0">
               <a:buNone/>
             </a:pPr>
             <a:r>
@@ -5928,7 +5928,7 @@
             </a:lvl1pPr>
           </a:lstStyle>
           <a:p>
-            <a:pPr algn="r"/>
+            <a:pPr eaLnBrk="0" algn="r"/>
             <a:fld id="{F7021451-1387-4CA6-816F-3879F97B5CBC}" type="slidenum">
               <a:rPr b="0" lang="en-US"/>
               <a:t>14</a:t>
@@ -5985,7 +5985,7 @@
           <a:bodyPr wrap="square" lIns="0" tIns="0" rIns="0" bIns="0" rtlCol="0" anchor="ctr"/>
           <a:lstStyle/>
           <a:p>
-            <a:pPr algn="l" indent="0" marL="0">
+            <a:pPr eaLnBrk="0" algn="l" indent="0" marL="0">
               <a:buNone/>
             </a:pPr>
             <a:r>
@@ -6032,7 +6032,7 @@
           <a:bodyPr wrap="square" lIns="0" tIns="0" rIns="0" bIns="0" rtlCol="0" anchor="ctr"/>
           <a:lstStyle/>
           <a:p>
-            <a:pPr algn="ctr" indent="0" marL="0">
+            <a:pPr eaLnBrk="0" algn="ctr" indent="0" marL="0">
               <a:buNone/>
             </a:pPr>
             <a:r>
@@ -6071,7 +6071,7 @@
           <a:bodyPr wrap="square" lIns="0" tIns="0" rIns="0" bIns="0" rtlCol="0" anchor="ctr"/>
           <a:lstStyle/>
           <a:p>
-            <a:pPr algn="ctr" indent="0" marL="0">
+            <a:pPr eaLnBrk="0" algn="ctr" indent="0" marL="0">
               <a:buNone/>
             </a:pPr>
             <a:r>
@@ -6088,7 +6088,7 @@
             <a:endParaRPr lang="ko-KR" sz="2600" dirty="0"/>
           </a:p>
           <a:p>
-            <a:pPr algn="ctr" indent="0" marL="0">
+            <a:pPr eaLnBrk="0" algn="ctr" indent="0" marL="0">
               <a:buNone/>
             </a:pPr>
             <a:r>
@@ -6105,7 +6105,7 @@
             <a:endParaRPr lang="ko-KR" sz="2600" dirty="0"/>
           </a:p>
           <a:p>
-            <a:pPr algn="ctr" indent="0" marL="0">
+            <a:pPr eaLnBrk="0" algn="ctr" indent="0" marL="0">
               <a:buNone/>
             </a:pPr>
             <a:r>
@@ -6152,7 +6152,7 @@
           <a:bodyPr wrap="square" lIns="0" tIns="0" rIns="0" bIns="0" rtlCol="0" anchor="ctr"/>
           <a:lstStyle/>
           <a:p>
-            <a:pPr algn="ctr" indent="0" marL="0">
+            <a:pPr eaLnBrk="0" algn="ctr" indent="0" marL="0">
               <a:buNone/>
             </a:pPr>
             <a:r>
@@ -6191,7 +6191,7 @@
           <a:bodyPr wrap="square" lIns="0" tIns="0" rIns="0" bIns="0" rtlCol="0" anchor="ctr"/>
           <a:lstStyle/>
           <a:p>
-            <a:pPr algn="ctr" indent="0" marL="0">
+            <a:pPr eaLnBrk="0" algn="ctr" indent="0" marL="0">
               <a:buNone/>
             </a:pPr>
             <a:r>
@@ -6208,7 +6208,7 @@
             <a:endParaRPr lang="ko-KR" sz="2600" dirty="0"/>
           </a:p>
           <a:p>
-            <a:pPr algn="ctr" indent="0" marL="0">
+            <a:pPr eaLnBrk="0" algn="ctr" indent="0" marL="0">
               <a:buNone/>
             </a:pPr>
             <a:r>
@@ -6225,7 +6225,7 @@
             <a:endParaRPr lang="ko-KR" sz="2600" dirty="0"/>
           </a:p>
           <a:p>
-            <a:pPr algn="ctr" indent="0" marL="0">
+            <a:pPr eaLnBrk="0" algn="ctr" indent="0" marL="0">
               <a:buNone/>
             </a:pPr>
             <a:r>
@@ -6272,7 +6272,7 @@
           <a:bodyPr wrap="square" lIns="0" tIns="0" rIns="0" bIns="0" rtlCol="0" anchor="ctr"/>
           <a:lstStyle/>
           <a:p>
-            <a:pPr algn="ctr" indent="0" marL="0">
+            <a:pPr eaLnBrk="0" algn="ctr" indent="0" marL="0">
               <a:buNone/>
             </a:pPr>
             <a:r>
@@ -6311,7 +6311,7 @@
           <a:bodyPr wrap="square" lIns="0" tIns="0" rIns="0" bIns="0" rtlCol="0" anchor="ctr"/>
           <a:lstStyle/>
           <a:p>
-            <a:pPr algn="l" indent="0" marL="0">
+            <a:pPr eaLnBrk="0" algn="l" indent="0" marL="0">
               <a:buNone/>
             </a:pPr>
             <a:r>
@@ -6368,7 +6368,7 @@
             </a:lvl1pPr>
           </a:lstStyle>
           <a:p>
-            <a:pPr algn="r"/>
+            <a:pPr eaLnBrk="0" algn="r"/>
             <a:fld id="{F7021451-1387-4CA6-816F-3879F97B5CBC}" type="slidenum">
               <a:rPr b="0" lang="en-US"/>
               <a:t>2</a:t>
@@ -6425,7 +6425,7 @@
           <a:bodyPr wrap="square" lIns="0" tIns="0" rIns="0" bIns="0" rtlCol="0" anchor="ctr"/>
           <a:lstStyle/>
           <a:p>
-            <a:pPr algn="l" indent="0" marL="0">
+            <a:pPr eaLnBrk="0" algn="l" indent="0" marL="0">
               <a:buNone/>
             </a:pPr>
             <a:r>
@@ -6464,7 +6464,7 @@
           <a:bodyPr wrap="square" lIns="0" tIns="0" rIns="0" bIns="0" rtlCol="0" anchor="ctr"/>
           <a:lstStyle/>
           <a:p>
-            <a:pPr algn="l" indent="0" marL="0">
+            <a:pPr eaLnBrk="0" algn="l" indent="0" marL="0">
               <a:buNone/>
             </a:pPr>
             <a:r>
@@ -6530,7 +6530,7 @@
           <a:bodyPr wrap="square" lIns="0" tIns="0" rIns="0" bIns="0" rtlCol="0" anchor="ctr"/>
           <a:lstStyle/>
           <a:p>
-            <a:pPr indent="0" marL="0">
+            <a:pPr eaLnBrk="0" indent="0" marL="0">
               <a:spcAft>
                 <a:spcPts val="600"/>
               </a:spcAft>
@@ -6550,7 +6550,7 @@
             <a:endParaRPr lang="ko-KR" sz="3200" dirty="0"/>
           </a:p>
           <a:p>
-            <a:pPr indent="0" marL="0">
+            <a:pPr eaLnBrk="0" indent="0" marL="0">
               <a:spcAft>
                 <a:spcPts val="600"/>
               </a:spcAft>
@@ -6696,7 +6696,7 @@
           <a:bodyPr wrap="square" lIns="0" tIns="0" rIns="0" bIns="0" rtlCol="0" anchor="ctr"/>
           <a:lstStyle/>
           <a:p>
-            <a:pPr algn="ctr" indent="0" marL="0">
+            <a:pPr eaLnBrk="0" algn="ctr" indent="0" marL="0">
               <a:buNone/>
             </a:pPr>
             <a:r>
@@ -6814,7 +6814,7 @@
           <a:bodyPr wrap="square" lIns="0" tIns="0" rIns="0" bIns="0" rtlCol="0" anchor="ctr"/>
           <a:lstStyle/>
           <a:p>
-            <a:pPr algn="ctr" indent="0" marL="0">
+            <a:pPr eaLnBrk="0" algn="ctr" indent="0" marL="0">
               <a:buNone/>
             </a:pPr>
             <a:r>
@@ -6871,7 +6871,7 @@
             </a:lvl1pPr>
           </a:lstStyle>
           <a:p>
-            <a:pPr algn="r"/>
+            <a:pPr eaLnBrk="0" algn="r"/>
             <a:fld id="{F7021451-1387-4CA6-816F-3879F97B5CBC}" type="slidenum">
               <a:rPr b="0" lang="en-US"/>
               <a:t>3</a:t>
@@ -6928,7 +6928,7 @@
           <a:bodyPr wrap="square" lIns="0" tIns="0" rIns="0" bIns="0" rtlCol="0" anchor="ctr"/>
           <a:lstStyle/>
           <a:p>
-            <a:pPr algn="l" indent="0" marL="0">
+            <a:pPr eaLnBrk="0" algn="l" indent="0" marL="0">
               <a:buNone/>
             </a:pPr>
             <a:r>
@@ -6967,7 +6967,7 @@
           <a:bodyPr wrap="square" lIns="0" tIns="0" rIns="0" bIns="0" rtlCol="0" anchor="ctr"/>
           <a:lstStyle/>
           <a:p>
-            <a:pPr algn="l" indent="0" marL="0">
+            <a:pPr eaLnBrk="0" algn="l" indent="0" marL="0">
               <a:buNone/>
             </a:pPr>
             <a:r>
@@ -7033,7 +7033,7 @@
           <a:bodyPr wrap="square" lIns="0" tIns="0" rIns="0" bIns="0" rtlCol="0" anchor="ctr"/>
           <a:lstStyle/>
           <a:p>
-            <a:pPr indent="0" marL="0">
+            <a:pPr eaLnBrk="0" indent="0" marL="0">
               <a:spcAft>
                 <a:spcPts val="600"/>
               </a:spcAft>
@@ -7053,7 +7053,7 @@
             <a:endParaRPr lang="ko-KR" sz="3200" dirty="0"/>
           </a:p>
           <a:p>
-            <a:pPr indent="0" marL="0">
+            <a:pPr eaLnBrk="0" indent="0" marL="0">
               <a:spcAft>
                 <a:spcPts val="600"/>
               </a:spcAft>
@@ -7224,7 +7224,7 @@
           <a:bodyPr wrap="square" lIns="0" tIns="0" rIns="0" bIns="0" rtlCol="0" anchor="ctr"/>
           <a:lstStyle/>
           <a:p>
-            <a:pPr algn="ctr" indent="0" marL="0">
+            <a:pPr eaLnBrk="0" algn="ctr" indent="0" marL="0">
               <a:buNone/>
             </a:pPr>
             <a:r>
@@ -7342,7 +7342,7 @@
           <a:bodyPr wrap="square" lIns="0" tIns="0" rIns="0" bIns="0" rtlCol="0" anchor="ctr"/>
           <a:lstStyle/>
           <a:p>
-            <a:pPr algn="ctr" indent="0" marL="0">
+            <a:pPr eaLnBrk="0" algn="ctr" indent="0" marL="0">
               <a:buNone/>
             </a:pPr>
             <a:r>
@@ -7399,7 +7399,7 @@
             </a:lvl1pPr>
           </a:lstStyle>
           <a:p>
-            <a:pPr algn="r"/>
+            <a:pPr eaLnBrk="0" algn="r"/>
             <a:fld id="{F7021451-1387-4CA6-816F-3879F97B5CBC}" type="slidenum">
               <a:rPr b="0" lang="en-US"/>
               <a:t>4</a:t>
@@ -7456,7 +7456,7 @@
           <a:bodyPr wrap="square" lIns="0" tIns="0" rIns="0" bIns="0" rtlCol="0" anchor="ctr"/>
           <a:lstStyle/>
           <a:p>
-            <a:pPr algn="l" indent="0" marL="0">
+            <a:pPr eaLnBrk="0" algn="l" indent="0" marL="0">
               <a:buNone/>
             </a:pPr>
             <a:r>
@@ -7495,7 +7495,7 @@
           <a:bodyPr wrap="square" lIns="0" tIns="0" rIns="0" bIns="0" rtlCol="0" anchor="ctr"/>
           <a:lstStyle/>
           <a:p>
-            <a:pPr algn="l" indent="0" marL="0">
+            <a:pPr eaLnBrk="0" algn="l" indent="0" marL="0">
               <a:buNone/>
             </a:pPr>
             <a:r>
@@ -7540,7 +7540,7 @@
           <a:bodyPr wrap="square" lIns="0" tIns="0" rIns="0" bIns="0" rtlCol="0" anchor="ctr"/>
           <a:lstStyle/>
           <a:p>
-            <a:pPr algn="ctr" indent="0" marL="0">
+            <a:pPr eaLnBrk="0" algn="ctr" indent="0" marL="0">
               <a:buNone/>
             </a:pPr>
             <a:r>
@@ -7579,7 +7579,7 @@
           <a:bodyPr wrap="square" lIns="0" tIns="0" rIns="0" bIns="0" rtlCol="0" anchor="t"/>
           <a:lstStyle/>
           <a:p>
-            <a:pPr algn="l" indent="0" marL="0">
+            <a:pPr eaLnBrk="0" algn="l" indent="0" marL="0">
               <a:buNone/>
             </a:pPr>
             <a:r>
@@ -7624,7 +7624,7 @@
           <a:bodyPr wrap="square" lIns="0" tIns="0" rIns="0" bIns="0" rtlCol="0" anchor="ctr"/>
           <a:lstStyle/>
           <a:p>
-            <a:pPr algn="ctr" indent="0" marL="0">
+            <a:pPr eaLnBrk="0" algn="ctr" indent="0" marL="0">
               <a:buNone/>
             </a:pPr>
             <a:r>
@@ -7663,7 +7663,7 @@
           <a:bodyPr wrap="square" lIns="0" tIns="0" rIns="0" bIns="0" rtlCol="0" anchor="t"/>
           <a:lstStyle/>
           <a:p>
-            <a:pPr algn="l" indent="0" marL="0">
+            <a:pPr eaLnBrk="0" algn="l" indent="0" marL="0">
               <a:buNone/>
             </a:pPr>
             <a:r>
@@ -7708,7 +7708,7 @@
           <a:bodyPr wrap="square" lIns="0" tIns="0" rIns="0" bIns="0" rtlCol="0" anchor="ctr"/>
           <a:lstStyle/>
           <a:p>
-            <a:pPr algn="ctr" indent="0" marL="0">
+            <a:pPr eaLnBrk="0" algn="ctr" indent="0" marL="0">
               <a:buNone/>
             </a:pPr>
             <a:r>
@@ -7747,7 +7747,7 @@
           <a:bodyPr wrap="square" lIns="0" tIns="0" rIns="0" bIns="0" rtlCol="0" anchor="t"/>
           <a:lstStyle/>
           <a:p>
-            <a:pPr algn="l" indent="0" marL="0">
+            <a:pPr eaLnBrk="0" algn="l" indent="0" marL="0">
               <a:buNone/>
             </a:pPr>
             <a:r>
@@ -7792,7 +7792,7 @@
           <a:bodyPr wrap="square" lIns="0" tIns="0" rIns="0" bIns="0" rtlCol="0" anchor="ctr"/>
           <a:lstStyle/>
           <a:p>
-            <a:pPr algn="ctr" indent="0" marL="0">
+            <a:pPr eaLnBrk="0" algn="ctr" indent="0" marL="0">
               <a:buNone/>
             </a:pPr>
             <a:r>
@@ -7831,7 +7831,7 @@
           <a:bodyPr wrap="square" lIns="0" tIns="0" rIns="0" bIns="0" rtlCol="0" anchor="t"/>
           <a:lstStyle/>
           <a:p>
-            <a:pPr algn="l" indent="0" marL="0">
+            <a:pPr eaLnBrk="0" algn="l" indent="0" marL="0">
               <a:buNone/>
             </a:pPr>
             <a:r>
@@ -7888,7 +7888,7 @@
             </a:lvl1pPr>
           </a:lstStyle>
           <a:p>
-            <a:pPr algn="r"/>
+            <a:pPr eaLnBrk="0" algn="r"/>
             <a:fld id="{F7021451-1387-4CA6-816F-3879F97B5CBC}" type="slidenum">
               <a:rPr b="0" lang="en-US"/>
               <a:t>5</a:t>
@@ -7945,7 +7945,7 @@
           <a:bodyPr wrap="square" lIns="0" tIns="0" rIns="0" bIns="0" rtlCol="0" anchor="ctr"/>
           <a:lstStyle/>
           <a:p>
-            <a:pPr algn="l" indent="0" marL="0">
+            <a:pPr eaLnBrk="0" algn="l" indent="0" marL="0">
               <a:buNone/>
             </a:pPr>
             <a:r>
@@ -7984,7 +7984,7 @@
           <a:bodyPr wrap="square" lIns="0" tIns="0" rIns="0" bIns="0" rtlCol="0" anchor="ctr"/>
           <a:lstStyle/>
           <a:p>
-            <a:pPr algn="l" indent="0" marL="0">
+            <a:pPr eaLnBrk="0" algn="l" indent="0" marL="0">
               <a:buNone/>
             </a:pPr>
             <a:r>
@@ -8071,7 +8071,7 @@
           <a:bodyPr wrap="square" lIns="0" tIns="0" rIns="0" bIns="0" rtlCol="0" anchor="ctr"/>
           <a:lstStyle/>
           <a:p>
-            <a:pPr algn="ctr" indent="0" marL="0">
+            <a:pPr eaLnBrk="0" algn="ctr" indent="0" marL="0">
               <a:buNone/>
             </a:pPr>
             <a:r>
@@ -8133,7 +8133,7 @@
           <a:bodyPr wrap="square" lIns="0" tIns="0" rIns="0" bIns="0" rtlCol="0" anchor="ctr"/>
           <a:lstStyle/>
           <a:p>
-            <a:pPr algn="ctr" indent="0" marL="0">
+            <a:pPr eaLnBrk="0" algn="ctr" indent="0" marL="0">
               <a:buNone/>
             </a:pPr>
             <a:r>
@@ -8195,7 +8195,7 @@
           <a:bodyPr wrap="square" lIns="0" tIns="0" rIns="0" bIns="0" rtlCol="0" anchor="ctr"/>
           <a:lstStyle/>
           <a:p>
-            <a:pPr algn="ctr" indent="0" marL="0">
+            <a:pPr eaLnBrk="0" algn="ctr" indent="0" marL="0">
               <a:buNone/>
             </a:pPr>
             <a:r>
@@ -8257,7 +8257,7 @@
           <a:bodyPr wrap="square" lIns="0" tIns="0" rIns="0" bIns="0" rtlCol="0" anchor="ctr"/>
           <a:lstStyle/>
           <a:p>
-            <a:pPr algn="ctr" indent="0" marL="0">
+            <a:pPr eaLnBrk="0" algn="ctr" indent="0" marL="0">
               <a:buNone/>
             </a:pPr>
             <a:r>
@@ -8319,7 +8319,7 @@
           <a:bodyPr wrap="square" lIns="0" tIns="0" rIns="0" bIns="0" rtlCol="0" anchor="ctr"/>
           <a:lstStyle/>
           <a:p>
-            <a:pPr algn="ctr" indent="0" marL="0">
+            <a:pPr eaLnBrk="0" algn="ctr" indent="0" marL="0">
               <a:buNone/>
             </a:pPr>
             <a:r>
@@ -8381,7 +8381,7 @@
           <a:bodyPr wrap="square" lIns="0" tIns="0" rIns="0" bIns="0" rtlCol="0" anchor="ctr"/>
           <a:lstStyle/>
           <a:p>
-            <a:pPr algn="ctr" indent="0" marL="0">
+            <a:pPr eaLnBrk="0" algn="ctr" indent="0" marL="0">
               <a:buNone/>
             </a:pPr>
             <a:r>
@@ -8443,7 +8443,7 @@
           <a:bodyPr wrap="square" lIns="0" tIns="0" rIns="0" bIns="0" rtlCol="0" anchor="ctr"/>
           <a:lstStyle/>
           <a:p>
-            <a:pPr algn="ctr" indent="0" marL="0">
+            <a:pPr eaLnBrk="0" algn="ctr" indent="0" marL="0">
               <a:buNone/>
             </a:pPr>
             <a:r>
@@ -8505,7 +8505,7 @@
           <a:bodyPr wrap="square" lIns="0" tIns="0" rIns="0" bIns="0" rtlCol="0" anchor="ctr"/>
           <a:lstStyle/>
           <a:p>
-            <a:pPr algn="ctr" indent="0" marL="0">
+            <a:pPr eaLnBrk="0" algn="ctr" indent="0" marL="0">
               <a:buNone/>
             </a:pPr>
             <a:r>
@@ -8567,7 +8567,7 @@
           <a:bodyPr wrap="square" lIns="0" tIns="0" rIns="0" bIns="0" rtlCol="0" anchor="ctr"/>
           <a:lstStyle/>
           <a:p>
-            <a:pPr algn="ctr" indent="0" marL="0">
+            <a:pPr eaLnBrk="0" algn="ctr" indent="0" marL="0">
               <a:buNone/>
             </a:pPr>
             <a:r>
@@ -8629,7 +8629,7 @@
           <a:bodyPr wrap="square" lIns="0" tIns="0" rIns="0" bIns="0" rtlCol="0" anchor="ctr"/>
           <a:lstStyle/>
           <a:p>
-            <a:pPr algn="ctr" indent="0" marL="0">
+            <a:pPr eaLnBrk="0" algn="ctr" indent="0" marL="0">
               <a:buNone/>
             </a:pPr>
             <a:r>
@@ -8822,7 +8822,7 @@
           <a:bodyPr wrap="square" lIns="0" tIns="0" rIns="0" bIns="0" rtlCol="0" anchor="ctr"/>
           <a:lstStyle/>
           <a:p>
-            <a:pPr algn="ctr" indent="0" marL="0">
+            <a:pPr eaLnBrk="0" algn="ctr" indent="0" marL="0">
               <a:buNone/>
             </a:pPr>
             <a:r>
@@ -8861,7 +8861,7 @@
           <a:bodyPr wrap="square" lIns="0" tIns="0" rIns="0" bIns="0" rtlCol="0" anchor="t"/>
           <a:lstStyle/>
           <a:p>
-            <a:pPr algn="l" indent="0" marL="0">
+            <a:pPr eaLnBrk="0" algn="l" indent="0" marL="0">
               <a:buNone/>
             </a:pPr>
             <a:r>
@@ -8906,7 +8906,7 @@
           <a:bodyPr wrap="square" lIns="0" tIns="0" rIns="0" bIns="0" rtlCol="0" anchor="ctr"/>
           <a:lstStyle/>
           <a:p>
-            <a:pPr algn="ctr" indent="0" marL="0">
+            <a:pPr eaLnBrk="0" algn="ctr" indent="0" marL="0">
               <a:buNone/>
             </a:pPr>
             <a:r>
@@ -8945,7 +8945,7 @@
           <a:bodyPr wrap="square" lIns="0" tIns="0" rIns="0" bIns="0" rtlCol="0" anchor="t"/>
           <a:lstStyle/>
           <a:p>
-            <a:pPr algn="l" indent="0" marL="0">
+            <a:pPr eaLnBrk="0" algn="l" indent="0" marL="0">
               <a:buNone/>
             </a:pPr>
             <a:r>
@@ -8990,7 +8990,7 @@
           <a:bodyPr wrap="square" lIns="0" tIns="0" rIns="0" bIns="0" rtlCol="0" anchor="ctr"/>
           <a:lstStyle/>
           <a:p>
-            <a:pPr algn="ctr" indent="0" marL="0">
+            <a:pPr eaLnBrk="0" algn="ctr" indent="0" marL="0">
               <a:buNone/>
             </a:pPr>
             <a:r>
@@ -9029,7 +9029,7 @@
           <a:bodyPr wrap="square" lIns="0" tIns="0" rIns="0" bIns="0" rtlCol="0" anchor="t"/>
           <a:lstStyle/>
           <a:p>
-            <a:pPr algn="l" indent="0" marL="0">
+            <a:pPr eaLnBrk="0" algn="l" indent="0" marL="0">
               <a:buNone/>
             </a:pPr>
             <a:r>
@@ -9086,7 +9086,7 @@
             </a:lvl1pPr>
           </a:lstStyle>
           <a:p>
-            <a:pPr algn="r"/>
+            <a:pPr eaLnBrk="0" algn="r"/>
             <a:fld id="{F7021451-1387-4CA6-816F-3879F97B5CBC}" type="slidenum">
               <a:rPr b="0" lang="en-US"/>
               <a:t>6</a:t>
@@ -9143,7 +9143,7 @@
           <a:bodyPr wrap="square" lIns="0" tIns="0" rIns="0" bIns="0" rtlCol="0" anchor="ctr"/>
           <a:lstStyle/>
           <a:p>
-            <a:pPr algn="l" indent="0" marL="0">
+            <a:pPr eaLnBrk="0" algn="l" indent="0" marL="0">
               <a:buNone/>
             </a:pPr>
             <a:r>
@@ -9182,7 +9182,7 @@
           <a:bodyPr wrap="square" lIns="0" tIns="0" rIns="0" bIns="0" rtlCol="0" anchor="ctr"/>
           <a:lstStyle/>
           <a:p>
-            <a:pPr algn="l" indent="0" marL="0">
+            <a:pPr eaLnBrk="0" algn="l" indent="0" marL="0">
               <a:buNone/>
             </a:pPr>
             <a:r>
@@ -9248,7 +9248,7 @@
           <a:bodyPr wrap="square" lIns="0" tIns="0" rIns="0" bIns="0" rtlCol="0" anchor="ctr"/>
           <a:lstStyle/>
           <a:p>
-            <a:pPr indent="0" marL="0">
+            <a:pPr eaLnBrk="0" indent="0" marL="0">
               <a:spcAft>
                 <a:spcPts val="600"/>
               </a:spcAft>
@@ -9298,7 +9298,7 @@
           <a:bodyPr wrap="square" lIns="0" tIns="0" rIns="0" bIns="0" rtlCol="0" anchor="ctr"/>
           <a:lstStyle/>
           <a:p>
-            <a:pPr algn="ctr" indent="0" marL="0">
+            <a:pPr eaLnBrk="0" algn="ctr" indent="0" marL="0">
               <a:buNone/>
             </a:pPr>
             <a:r>
@@ -9618,7 +9618,7 @@
       </p:sp>
       <p:sp>
         <p:nvSpPr>
-          <p:cNvPr id="19" name="S07-figure100" descr="십 칸 틀에 2개"/>
+          <p:cNvPr id="19" name="S07-figure100" descr="1개의 십 칸 틀 중 1번째: 모두 2개"/>
           <p:cNvSpPr/>
           <p:nvPr/>
         </p:nvSpPr>
@@ -9995,7 +9995,7 @@
       </p:sp>
       <p:sp>
         <p:nvSpPr>
-          <p:cNvPr id="34" name="S07-figure115" descr="십 칸 틀에 4개"/>
+          <p:cNvPr id="34" name="S07-figure115" descr="1개의 십 칸 틀 중 1번째: 모두 4개"/>
           <p:cNvSpPr/>
           <p:nvPr/>
         </p:nvSpPr>
@@ -10049,7 +10049,7 @@
           <a:bodyPr wrap="square" lIns="0" tIns="0" rIns="0" bIns="0" rtlCol="0" anchor="ctr"/>
           <a:lstStyle/>
           <a:p>
-            <a:pPr algn="ctr" indent="0" marL="0">
+            <a:pPr eaLnBrk="0" algn="ctr" indent="0" marL="0">
               <a:buNone/>
             </a:pPr>
             <a:r>
@@ -10444,7 +10444,7 @@
       </p:sp>
       <p:sp>
         <p:nvSpPr>
-          <p:cNvPr id="51" name="S07-figure132" descr="십 칸 틀에 5개"/>
+          <p:cNvPr id="51" name="S07-figure132" descr="1개의 십 칸 틀 중 1번째: 모두 5개"/>
           <p:cNvSpPr/>
           <p:nvPr/>
         </p:nvSpPr>
@@ -10796,7 +10796,7 @@
       </p:sp>
       <p:sp>
         <p:nvSpPr>
-          <p:cNvPr id="65" name="S07-figure146" descr="십 칸 틀에 3개"/>
+          <p:cNvPr id="65" name="S07-figure146" descr="1개의 십 칸 틀 중 1번째: 모두 3개"/>
           <p:cNvSpPr/>
           <p:nvPr/>
         </p:nvSpPr>
@@ -10850,7 +10850,7 @@
           <a:bodyPr wrap="square" lIns="0" tIns="0" rIns="0" bIns="0" rtlCol="0" anchor="ctr"/>
           <a:lstStyle/>
           <a:p>
-            <a:pPr algn="ctr" indent="0" marL="0">
+            <a:pPr eaLnBrk="0" algn="ctr" indent="0" marL="0">
               <a:buNone/>
             </a:pPr>
             <a:r>
@@ -11145,7 +11145,7 @@
       </p:sp>
       <p:sp>
         <p:nvSpPr>
-          <p:cNvPr id="78" name="S07-figure159" descr="십 칸 틀에 1개"/>
+          <p:cNvPr id="78" name="S07-figure159" descr="1개의 십 칸 틀 중 1번째: 모두 1개"/>
           <p:cNvSpPr/>
           <p:nvPr/>
         </p:nvSpPr>
@@ -11572,7 +11572,7 @@
       </p:sp>
       <p:sp>
         <p:nvSpPr>
-          <p:cNvPr id="95" name="S07-figure176" descr="십 칸 틀에 6개"/>
+          <p:cNvPr id="95" name="S07-figure176" descr="1개의 십 칸 틀 중 1번째: 모두 6개"/>
           <p:cNvSpPr/>
           <p:nvPr/>
         </p:nvSpPr>
@@ -11636,7 +11636,7 @@
             </a:lvl1pPr>
           </a:lstStyle>
           <a:p>
-            <a:pPr algn="r"/>
+            <a:pPr eaLnBrk="0" algn="r"/>
             <a:fld id="{F7021451-1387-4CA6-816F-3879F97B5CBC}" type="slidenum">
               <a:rPr b="0" lang="en-US"/>
               <a:t>7</a:t>
@@ -11693,7 +11693,7 @@
           <a:bodyPr wrap="square" lIns="0" tIns="0" rIns="0" bIns="0" rtlCol="0" anchor="ctr"/>
           <a:lstStyle/>
           <a:p>
-            <a:pPr algn="l" indent="0" marL="0">
+            <a:pPr eaLnBrk="0" algn="l" indent="0" marL="0">
               <a:buNone/>
             </a:pPr>
             <a:r>
@@ -11759,7 +11759,7 @@
           <a:bodyPr wrap="square" lIns="0" tIns="0" rIns="0" bIns="0" rtlCol="0" anchor="ctr"/>
           <a:lstStyle/>
           <a:p>
-            <a:pPr indent="0" marL="0">
+            <a:pPr eaLnBrk="0" indent="0" marL="0">
               <a:spcAft>
                 <a:spcPts val="600"/>
               </a:spcAft>
@@ -11809,7 +11809,7 @@
           <a:bodyPr wrap="square" lIns="0" tIns="0" rIns="0" bIns="0" rtlCol="0" anchor="ctr"/>
           <a:lstStyle/>
           <a:p>
-            <a:pPr algn="ctr" indent="0" marL="0">
+            <a:pPr eaLnBrk="0" algn="ctr" indent="0" marL="0">
               <a:buNone/>
             </a:pPr>
             <a:r>
@@ -11848,7 +11848,7 @@
           <a:bodyPr wrap="square" lIns="0" tIns="0" rIns="0" bIns="0" rtlCol="0" anchor="ctr"/>
           <a:lstStyle/>
           <a:p>
-            <a:pPr algn="l" indent="0" marL="0">
+            <a:pPr eaLnBrk="0" algn="l" indent="0" marL="0">
               <a:buNone/>
             </a:pPr>
             <a:r>
@@ -11895,7 +11895,7 @@
           <a:bodyPr wrap="square" lIns="0" tIns="0" rIns="0" bIns="0" rtlCol="0" anchor="ctr"/>
           <a:lstStyle/>
           <a:p>
-            <a:pPr algn="ctr" indent="0" marL="0">
+            <a:pPr eaLnBrk="0" algn="ctr" indent="0" marL="0">
               <a:buNone/>
             </a:pPr>
             <a:r>
@@ -11934,7 +11934,7 @@
           <a:bodyPr wrap="square" lIns="0" tIns="0" rIns="0" bIns="0" rtlCol="0" anchor="ctr"/>
           <a:lstStyle/>
           <a:p>
-            <a:pPr algn="l" indent="0" marL="0">
+            <a:pPr eaLnBrk="0" algn="l" indent="0" marL="0">
               <a:buNone/>
             </a:pPr>
             <a:r>
@@ -11981,7 +11981,7 @@
           <a:bodyPr wrap="square" lIns="0" tIns="0" rIns="0" bIns="0" rtlCol="0" anchor="ctr"/>
           <a:lstStyle/>
           <a:p>
-            <a:pPr algn="ctr" indent="0" marL="0">
+            <a:pPr eaLnBrk="0" algn="ctr" indent="0" marL="0">
               <a:buNone/>
             </a:pPr>
             <a:r>
@@ -12020,7 +12020,7 @@
           <a:bodyPr wrap="square" lIns="0" tIns="0" rIns="0" bIns="0" rtlCol="0" anchor="ctr"/>
           <a:lstStyle/>
           <a:p>
-            <a:pPr algn="l" indent="0" marL="0">
+            <a:pPr eaLnBrk="0" algn="l" indent="0" marL="0">
               <a:buNone/>
             </a:pPr>
             <a:r>
@@ -12067,7 +12067,7 @@
           <a:bodyPr wrap="square" lIns="0" tIns="0" rIns="0" bIns="0" rtlCol="0" anchor="ctr"/>
           <a:lstStyle/>
           <a:p>
-            <a:pPr algn="ctr" indent="0" marL="0">
+            <a:pPr eaLnBrk="0" algn="ctr" indent="0" marL="0">
               <a:buNone/>
             </a:pPr>
             <a:r>
@@ -12106,7 +12106,7 @@
           <a:bodyPr wrap="square" lIns="0" tIns="0" rIns="0" bIns="0" rtlCol="0" anchor="ctr"/>
           <a:lstStyle/>
           <a:p>
-            <a:pPr algn="l" indent="0" marL="0">
+            <a:pPr eaLnBrk="0" algn="l" indent="0" marL="0">
               <a:buNone/>
             </a:pPr>
             <a:r>
@@ -12163,7 +12163,7 @@
             </a:lvl1pPr>
           </a:lstStyle>
           <a:p>
-            <a:pPr algn="r"/>
+            <a:pPr eaLnBrk="0" algn="r"/>
             <a:fld id="{F7021451-1387-4CA6-816F-3879F97B5CBC}" type="slidenum">
               <a:rPr b="0" lang="en-US"/>
               <a:t>8</a:t>
@@ -12220,7 +12220,7 @@
           <a:bodyPr wrap="square" lIns="0" tIns="0" rIns="0" bIns="0" rtlCol="0" anchor="ctr"/>
           <a:lstStyle/>
           <a:p>
-            <a:pPr algn="l" indent="0" marL="0">
+            <a:pPr eaLnBrk="0" algn="l" indent="0" marL="0">
               <a:buNone/>
             </a:pPr>
             <a:r>
@@ -12286,7 +12286,7 @@
           <a:bodyPr wrap="square" lIns="0" tIns="0" rIns="0" bIns="0" rtlCol="0" anchor="ctr"/>
           <a:lstStyle/>
           <a:p>
-            <a:pPr indent="0" marL="0">
+            <a:pPr eaLnBrk="0" indent="0" marL="0">
               <a:spcAft>
                 <a:spcPts val="600"/>
               </a:spcAft>
@@ -12355,7 +12355,7 @@
           <a:bodyPr wrap="square" lIns="0" tIns="0" rIns="0" bIns="0" rtlCol="0" anchor="ctr"/>
           <a:lstStyle/>
           <a:p>
-            <a:pPr indent="0" marL="0">
+            <a:pPr eaLnBrk="0" indent="0" marL="0">
               <a:spcAft>
                 <a:spcPts val="600"/>
               </a:spcAft>
@@ -12405,7 +12405,7 @@
           <a:bodyPr wrap="square" lIns="177800" tIns="0" rIns="177800" bIns="0" rtlCol="0" anchor="ctr"/>
           <a:lstStyle/>
           <a:p>
-            <a:pPr algn="l" indent="0" marL="0">
+            <a:pPr eaLnBrk="0" algn="l" indent="0" marL="0">
               <a:buNone/>
             </a:pPr>
             <a:r>
@@ -12444,7 +12444,7 @@
           <a:bodyPr wrap="square" lIns="0" tIns="0" rIns="0" bIns="0" rtlCol="0" anchor="t"/>
           <a:lstStyle/>
           <a:p>
-            <a:pPr algn="l" indent="0" marL="0">
+            <a:pPr eaLnBrk="0" algn="l" indent="0" marL="0">
               <a:buNone/>
             </a:pPr>
             <a:r>
@@ -12461,7 +12461,7 @@
             <a:endParaRPr lang="ko-KR" sz="3200" dirty="0"/>
           </a:p>
           <a:p>
-            <a:pPr algn="l" indent="0" marL="0">
+            <a:pPr eaLnBrk="0" algn="l" indent="0" marL="0">
               <a:buNone/>
             </a:pPr>
             <a:r>
@@ -12508,7 +12508,7 @@
           <a:bodyPr wrap="square" lIns="177800" tIns="0" rIns="177800" bIns="0" rtlCol="0" anchor="ctr"/>
           <a:lstStyle/>
           <a:p>
-            <a:pPr algn="l" indent="0" marL="0">
+            <a:pPr eaLnBrk="0" algn="l" indent="0" marL="0">
               <a:buNone/>
             </a:pPr>
             <a:r>
@@ -12547,7 +12547,7 @@
           <a:bodyPr wrap="square" lIns="0" tIns="0" rIns="0" bIns="0" rtlCol="0" anchor="t"/>
           <a:lstStyle/>
           <a:p>
-            <a:pPr algn="l" indent="0" marL="0">
+            <a:pPr eaLnBrk="0" algn="l" indent="0" marL="0">
               <a:buNone/>
             </a:pPr>
             <a:r>
@@ -12564,7 +12564,7 @@
             <a:endParaRPr lang="ko-KR" sz="3200" dirty="0"/>
           </a:p>
           <a:p>
-            <a:pPr algn="l" indent="0" marL="0">
+            <a:pPr eaLnBrk="0" algn="l" indent="0" marL="0">
               <a:buNone/>
             </a:pPr>
             <a:r>
@@ -12621,7 +12621,7 @@
             </a:lvl1pPr>
           </a:lstStyle>
           <a:p>
-            <a:pPr algn="r"/>
+            <a:pPr eaLnBrk="0" algn="r"/>
             <a:fld id="{F7021451-1387-4CA6-816F-3879F97B5CBC}" type="slidenum">
               <a:rPr b="0" lang="en-US"/>
               <a:t>9</a:t>

--- a/dist/초1/수학/수와연산/초1_수학_수와연산_04_덧셈의뜻.pptx
+++ b/dist/초1/수학/수와연산/초1_수학_수와연산_04_덧셈의뜻.pptx
@@ -120,13 +120,13 @@
   <p:extLst>
     <p:ext uri="{521415D9-36F7-43E2-AB2F-B90AF26B5E84}">
       <p14:sectionLst xmlns:p14="http://schemas.microsoft.com/office/powerpoint/2010/main">
-        <p14:section name="도입" id="{9841aa6b-1349-daf8-07e0-25e7dc58b7c4}">
+        <p14:section name="도입" id="{195ebcb9-cc14-32d7-b508-8fbd0d771756}">
           <p14:sldIdLst>
             <p14:sldId id="256"/>
             <p14:sldId id="257"/>
           </p14:sldIdLst>
         </p14:section>
-        <p14:section name="개념" id="{0d5b4c4d-1798-c851-240d-40cdfdc0c135}">
+        <p14:section name="개념" id="{1eb864f4-6456-2fdf-cadb-a3ba49e36478}">
           <p14:sldIdLst>
             <p14:sldId id="258"/>
             <p14:sldId id="259"/>
@@ -134,26 +134,26 @@
             <p14:sldId id="261"/>
           </p14:sldIdLst>
         </p14:section>
-        <p14:section name="연습" id="{9b58a8ff-d892-46dd-0182-1cb0434dadb6}">
+        <p14:section name="연습" id="{22862124-a2d7-0d22-e90e-f6413d78909e}">
           <p14:sldIdLst>
             <p14:sldId id="262"/>
             <p14:sldId id="263"/>
             <p14:sldId id="264"/>
           </p14:sldIdLst>
         </p14:section>
-        <p14:section name="확인" id="{4edadbbd-d611-0a8c-7786-f170a3c9bb74}">
+        <p14:section name="확인" id="{4ebbff3f-de3d-534c-0d26-f409f73c6037}">
           <p14:sldIdLst>
             <p14:sldId id="265"/>
             <p14:sldId id="266"/>
             <p14:sldId id="267"/>
           </p14:sldIdLst>
         </p14:section>
-        <p14:section name="정리" id="{32475620-7fa8-9545-1576-a392b21073b4}">
+        <p14:section name="정리" id="{ac155ba5-5e12-4d22-acac-d5adcc4c869c}">
           <p14:sldIdLst>
             <p14:sldId id="268"/>
           </p14:sldIdLst>
         </p14:section>
-        <p14:section name="보충" id="{4c6a921b-4e78-cd77-69ed-321cc23d6c36}">
+        <p14:section name="보충" id="{20e1275d-5f0b-43f9-0bea-67579eb4204b}">
           <p14:sldIdLst>
             <p14:sldId id="269"/>
           </p14:sldIdLst>
@@ -6011,7 +6011,7 @@
         </p:nvSpPr>
         <p:spPr>
           <a:xfrm>
-            <a:off x="548640" y="1773936"/>
+            <a:off x="548640" y="1796796"/>
             <a:ext cx="566928" cy="566928"/>
           </a:xfrm>
           <a:prstGeom prst="roundRect">
@@ -6059,7 +6059,7 @@
         <p:spPr>
           <a:xfrm>
             <a:off x="1344168" y="1325880"/>
-            <a:ext cx="4206240" cy="1463040"/>
+            <a:ext cx="5486400" cy="1508760"/>
           </a:xfrm>
           <a:prstGeom prst="rect">
             <a:avLst/>
@@ -6075,7 +6075,7 @@
               <a:buNone/>
             </a:pPr>
             <a:r>
-              <a:rPr lang="ko-KR" altLang="en-US" sz="2600" b="1" dirty="0">
+              <a:rPr lang="ko-KR" altLang="en-US" sz="3200" b="1" dirty="0">
                 <a:solidFill>
                   <a:srgbClr val="1F2937"/>
                 </a:solidFill>
@@ -6085,14 +6085,14 @@
               </a:rPr>
               <a:t>3        2</a:t>
             </a:r>
-            <a:endParaRPr lang="ko-KR" sz="2600" dirty="0"/>
+            <a:endParaRPr lang="ko-KR" sz="3200" dirty="0"/>
           </a:p>
           <a:p>
             <a:pPr eaLnBrk="0" algn="ctr" indent="0" marL="0">
               <a:buNone/>
             </a:pPr>
             <a:r>
-              <a:rPr lang="ko-KR" altLang="en-US" sz="2600" b="1" dirty="0">
+              <a:rPr lang="ko-KR" altLang="en-US" sz="3200" b="1" dirty="0">
                 <a:solidFill>
                   <a:srgbClr val="1F2937"/>
                 </a:solidFill>
@@ -6102,14 +6102,14 @@
               </a:rPr>
               <a:t>↘    ↙</a:t>
             </a:r>
-            <a:endParaRPr lang="ko-KR" sz="2600" dirty="0"/>
+            <a:endParaRPr lang="ko-KR" sz="3200" dirty="0"/>
           </a:p>
           <a:p>
             <a:pPr eaLnBrk="0" algn="ctr" indent="0" marL="0">
               <a:buNone/>
             </a:pPr>
             <a:r>
-              <a:rPr lang="ko-KR" altLang="en-US" sz="2600" b="1" dirty="0">
+              <a:rPr lang="ko-KR" altLang="en-US" sz="3200" b="1" dirty="0">
                 <a:solidFill>
                   <a:srgbClr val="1F2937"/>
                 </a:solidFill>
@@ -6119,7 +6119,7 @@
               </a:rPr>
               <a:t>□</a:t>
             </a:r>
-            <a:endParaRPr lang="ko-KR" sz="2600" dirty="0"/>
+            <a:endParaRPr lang="ko-KR" sz="3200" dirty="0"/>
           </a:p>
         </p:txBody>
       </p:sp>
@@ -6131,7 +6131,7 @@
         </p:nvSpPr>
         <p:spPr>
           <a:xfrm>
-            <a:off x="548640" y="3465576"/>
+            <a:off x="548640" y="3488436"/>
             <a:ext cx="566928" cy="566928"/>
           </a:xfrm>
           <a:prstGeom prst="roundRect">
@@ -6179,7 +6179,7 @@
         <p:spPr>
           <a:xfrm>
             <a:off x="1344168" y="3017520"/>
-            <a:ext cx="4206240" cy="1463040"/>
+            <a:ext cx="5486400" cy="1508760"/>
           </a:xfrm>
           <a:prstGeom prst="rect">
             <a:avLst/>
@@ -6195,7 +6195,7 @@
               <a:buNone/>
             </a:pPr>
             <a:r>
-              <a:rPr lang="ko-KR" altLang="en-US" sz="2600" b="1" dirty="0">
+              <a:rPr lang="ko-KR" altLang="en-US" sz="3200" b="1" dirty="0">
                 <a:solidFill>
                   <a:srgbClr val="1F2937"/>
                 </a:solidFill>
@@ -6205,14 +6205,14 @@
               </a:rPr>
               <a:t>7</a:t>
             </a:r>
-            <a:endParaRPr lang="ko-KR" sz="2600" dirty="0"/>
+            <a:endParaRPr lang="ko-KR" sz="3200" dirty="0"/>
           </a:p>
           <a:p>
             <a:pPr eaLnBrk="0" algn="ctr" indent="0" marL="0">
               <a:buNone/>
             </a:pPr>
             <a:r>
-              <a:rPr lang="ko-KR" altLang="en-US" sz="2600" b="1" dirty="0">
+              <a:rPr lang="ko-KR" altLang="en-US" sz="3200" b="1" dirty="0">
                 <a:solidFill>
                   <a:srgbClr val="1F2937"/>
                 </a:solidFill>
@@ -6222,14 +6222,14 @@
               </a:rPr>
               <a:t>↙    ↘</a:t>
             </a:r>
-            <a:endParaRPr lang="ko-KR" sz="2600" dirty="0"/>
+            <a:endParaRPr lang="ko-KR" sz="3200" dirty="0"/>
           </a:p>
           <a:p>
             <a:pPr eaLnBrk="0" algn="ctr" indent="0" marL="0">
               <a:buNone/>
             </a:pPr>
             <a:r>
-              <a:rPr lang="ko-KR" altLang="en-US" sz="2600" b="1" dirty="0">
+              <a:rPr lang="ko-KR" altLang="en-US" sz="3200" b="1" dirty="0">
                 <a:solidFill>
                   <a:srgbClr val="1F2937"/>
                 </a:solidFill>
@@ -6239,7 +6239,7 @@
               </a:rPr>
               <a:t>4        □</a:t>
             </a:r>
-            <a:endParaRPr lang="ko-KR" sz="2600" dirty="0"/>
+            <a:endParaRPr lang="ko-KR" sz="3200" dirty="0"/>
           </a:p>
         </p:txBody>
       </p:sp>
@@ -9324,8 +9324,8 @@
         </p:nvSpPr>
         <p:spPr>
           <a:xfrm>
-            <a:off x="1344168" y="2080260"/>
-            <a:ext cx="388620" cy="388620"/>
+            <a:off x="1492758" y="2011680"/>
+            <a:ext cx="457200" cy="457200"/>
           </a:xfrm>
           <a:prstGeom prst="rect">
             <a:avLst/>
@@ -9349,8 +9349,8 @@
         </p:nvSpPr>
         <p:spPr>
           <a:xfrm>
-            <a:off x="1410233" y="2146325"/>
-            <a:ext cx="256489" cy="256489"/>
+            <a:off x="1570482" y="2089404"/>
+            <a:ext cx="301752" cy="301752"/>
           </a:xfrm>
           <a:prstGeom prst="ellipse">
             <a:avLst/>
@@ -9374,8 +9374,8 @@
         </p:nvSpPr>
         <p:spPr>
           <a:xfrm>
-            <a:off x="1732788" y="2080260"/>
-            <a:ext cx="388620" cy="388620"/>
+            <a:off x="1949958" y="2011680"/>
+            <a:ext cx="457200" cy="457200"/>
           </a:xfrm>
           <a:prstGeom prst="rect">
             <a:avLst/>
@@ -9399,8 +9399,8 @@
         </p:nvSpPr>
         <p:spPr>
           <a:xfrm>
-            <a:off x="1798853" y="2146325"/>
-            <a:ext cx="256489" cy="256489"/>
+            <a:off x="2027682" y="2089404"/>
+            <a:ext cx="301752" cy="301752"/>
           </a:xfrm>
           <a:prstGeom prst="ellipse">
             <a:avLst/>
@@ -9424,8 +9424,8 @@
         </p:nvSpPr>
         <p:spPr>
           <a:xfrm>
-            <a:off x="2121408" y="2080260"/>
-            <a:ext cx="388620" cy="388620"/>
+            <a:off x="2407158" y="2011680"/>
+            <a:ext cx="457200" cy="457200"/>
           </a:xfrm>
           <a:prstGeom prst="rect">
             <a:avLst/>
@@ -9449,8 +9449,8 @@
         </p:nvSpPr>
         <p:spPr>
           <a:xfrm>
-            <a:off x="2510028" y="2080260"/>
-            <a:ext cx="388620" cy="388620"/>
+            <a:off x="2864358" y="2011680"/>
+            <a:ext cx="457200" cy="457200"/>
           </a:xfrm>
           <a:prstGeom prst="rect">
             <a:avLst/>
@@ -9474,8 +9474,8 @@
         </p:nvSpPr>
         <p:spPr>
           <a:xfrm>
-            <a:off x="2898648" y="2080260"/>
-            <a:ext cx="388620" cy="388620"/>
+            <a:off x="3321558" y="2011680"/>
+            <a:ext cx="457200" cy="457200"/>
           </a:xfrm>
           <a:prstGeom prst="rect">
             <a:avLst/>
@@ -9499,8 +9499,8 @@
         </p:nvSpPr>
         <p:spPr>
           <a:xfrm>
-            <a:off x="1344168" y="2468880"/>
-            <a:ext cx="388620" cy="388620"/>
+            <a:off x="1492758" y="2468880"/>
+            <a:ext cx="457200" cy="457200"/>
           </a:xfrm>
           <a:prstGeom prst="rect">
             <a:avLst/>
@@ -9524,8 +9524,8 @@
         </p:nvSpPr>
         <p:spPr>
           <a:xfrm>
-            <a:off x="1732788" y="2468880"/>
-            <a:ext cx="388620" cy="388620"/>
+            <a:off x="1949958" y="2468880"/>
+            <a:ext cx="457200" cy="457200"/>
           </a:xfrm>
           <a:prstGeom prst="rect">
             <a:avLst/>
@@ -9549,8 +9549,8 @@
         </p:nvSpPr>
         <p:spPr>
           <a:xfrm>
-            <a:off x="2121408" y="2468880"/>
-            <a:ext cx="388620" cy="388620"/>
+            <a:off x="2407158" y="2468880"/>
+            <a:ext cx="457200" cy="457200"/>
           </a:xfrm>
           <a:prstGeom prst="rect">
             <a:avLst/>
@@ -9574,8 +9574,8 @@
         </p:nvSpPr>
         <p:spPr>
           <a:xfrm>
-            <a:off x="2510028" y="2468880"/>
-            <a:ext cx="388620" cy="388620"/>
+            <a:off x="2864358" y="2468880"/>
+            <a:ext cx="457200" cy="457200"/>
           </a:xfrm>
           <a:prstGeom prst="rect">
             <a:avLst/>
@@ -9599,8 +9599,8 @@
         </p:nvSpPr>
         <p:spPr>
           <a:xfrm>
-            <a:off x="2898648" y="2468880"/>
-            <a:ext cx="388620" cy="388620"/>
+            <a:off x="3321558" y="2468880"/>
+            <a:ext cx="457200" cy="457200"/>
           </a:xfrm>
           <a:prstGeom prst="rect">
             <a:avLst/>
@@ -9624,8 +9624,8 @@
         </p:nvSpPr>
         <p:spPr>
           <a:xfrm>
-            <a:off x="1344168" y="2080260"/>
-            <a:ext cx="1943100" cy="777240"/>
+            <a:off x="1492758" y="2011680"/>
+            <a:ext cx="2286000" cy="914400"/>
           </a:xfrm>
           <a:prstGeom prst="rect">
             <a:avLst/>
@@ -9651,8 +9651,8 @@
         </p:nvSpPr>
         <p:spPr>
           <a:xfrm>
-            <a:off x="3607308" y="2080260"/>
-            <a:ext cx="388620" cy="388620"/>
+            <a:off x="4395978" y="2011680"/>
+            <a:ext cx="457200" cy="457200"/>
           </a:xfrm>
           <a:prstGeom prst="rect">
             <a:avLst/>
@@ -9676,8 +9676,8 @@
         </p:nvSpPr>
         <p:spPr>
           <a:xfrm>
-            <a:off x="3673373" y="2146325"/>
-            <a:ext cx="256489" cy="256489"/>
+            <a:off x="4473702" y="2089404"/>
+            <a:ext cx="301752" cy="301752"/>
           </a:xfrm>
           <a:prstGeom prst="ellipse">
             <a:avLst/>
@@ -9701,8 +9701,8 @@
         </p:nvSpPr>
         <p:spPr>
           <a:xfrm>
-            <a:off x="3995928" y="2080260"/>
-            <a:ext cx="388620" cy="388620"/>
+            <a:off x="4853178" y="2011680"/>
+            <a:ext cx="457200" cy="457200"/>
           </a:xfrm>
           <a:prstGeom prst="rect">
             <a:avLst/>
@@ -9726,8 +9726,8 @@
         </p:nvSpPr>
         <p:spPr>
           <a:xfrm>
-            <a:off x="4061993" y="2146325"/>
-            <a:ext cx="256489" cy="256489"/>
+            <a:off x="4930902" y="2089404"/>
+            <a:ext cx="301752" cy="301752"/>
           </a:xfrm>
           <a:prstGeom prst="ellipse">
             <a:avLst/>
@@ -9751,8 +9751,8 @@
         </p:nvSpPr>
         <p:spPr>
           <a:xfrm>
-            <a:off x="4384548" y="2080260"/>
-            <a:ext cx="388620" cy="388620"/>
+            <a:off x="5310378" y="2011680"/>
+            <a:ext cx="457200" cy="457200"/>
           </a:xfrm>
           <a:prstGeom prst="rect">
             <a:avLst/>
@@ -9776,8 +9776,8 @@
         </p:nvSpPr>
         <p:spPr>
           <a:xfrm>
-            <a:off x="4450613" y="2146325"/>
-            <a:ext cx="256489" cy="256489"/>
+            <a:off x="5388102" y="2089404"/>
+            <a:ext cx="301752" cy="301752"/>
           </a:xfrm>
           <a:prstGeom prst="ellipse">
             <a:avLst/>
@@ -9801,8 +9801,8 @@
         </p:nvSpPr>
         <p:spPr>
           <a:xfrm>
-            <a:off x="4773168" y="2080260"/>
-            <a:ext cx="388620" cy="388620"/>
+            <a:off x="5767578" y="2011680"/>
+            <a:ext cx="457200" cy="457200"/>
           </a:xfrm>
           <a:prstGeom prst="rect">
             <a:avLst/>
@@ -9826,8 +9826,8 @@
         </p:nvSpPr>
         <p:spPr>
           <a:xfrm>
-            <a:off x="4839233" y="2146325"/>
-            <a:ext cx="256489" cy="256489"/>
+            <a:off x="5845302" y="2089404"/>
+            <a:ext cx="301752" cy="301752"/>
           </a:xfrm>
           <a:prstGeom prst="ellipse">
             <a:avLst/>
@@ -9851,8 +9851,8 @@
         </p:nvSpPr>
         <p:spPr>
           <a:xfrm>
-            <a:off x="5161788" y="2080260"/>
-            <a:ext cx="388620" cy="388620"/>
+            <a:off x="6224778" y="2011680"/>
+            <a:ext cx="457200" cy="457200"/>
           </a:xfrm>
           <a:prstGeom prst="rect">
             <a:avLst/>
@@ -9876,8 +9876,8 @@
         </p:nvSpPr>
         <p:spPr>
           <a:xfrm>
-            <a:off x="3607308" y="2468880"/>
-            <a:ext cx="388620" cy="388620"/>
+            <a:off x="4395978" y="2468880"/>
+            <a:ext cx="457200" cy="457200"/>
           </a:xfrm>
           <a:prstGeom prst="rect">
             <a:avLst/>
@@ -9901,8 +9901,8 @@
         </p:nvSpPr>
         <p:spPr>
           <a:xfrm>
-            <a:off x="3995928" y="2468880"/>
-            <a:ext cx="388620" cy="388620"/>
+            <a:off x="4853178" y="2468880"/>
+            <a:ext cx="457200" cy="457200"/>
           </a:xfrm>
           <a:prstGeom prst="rect">
             <a:avLst/>
@@ -9926,8 +9926,8 @@
         </p:nvSpPr>
         <p:spPr>
           <a:xfrm>
-            <a:off x="4384548" y="2468880"/>
-            <a:ext cx="388620" cy="388620"/>
+            <a:off x="5310378" y="2468880"/>
+            <a:ext cx="457200" cy="457200"/>
           </a:xfrm>
           <a:prstGeom prst="rect">
             <a:avLst/>
@@ -9951,8 +9951,8 @@
         </p:nvSpPr>
         <p:spPr>
           <a:xfrm>
-            <a:off x="4773168" y="2468880"/>
-            <a:ext cx="388620" cy="388620"/>
+            <a:off x="5767578" y="2468880"/>
+            <a:ext cx="457200" cy="457200"/>
           </a:xfrm>
           <a:prstGeom prst="rect">
             <a:avLst/>
@@ -9976,8 +9976,8 @@
         </p:nvSpPr>
         <p:spPr>
           <a:xfrm>
-            <a:off x="5161788" y="2468880"/>
-            <a:ext cx="388620" cy="388620"/>
+            <a:off x="6224778" y="2468880"/>
+            <a:ext cx="457200" cy="457200"/>
           </a:xfrm>
           <a:prstGeom prst="rect">
             <a:avLst/>
@@ -10001,8 +10001,8 @@
         </p:nvSpPr>
         <p:spPr>
           <a:xfrm>
-            <a:off x="3607308" y="2080260"/>
-            <a:ext cx="1943100" cy="777240"/>
+            <a:off x="4395978" y="2011680"/>
+            <a:ext cx="2286000" cy="914400"/>
           </a:xfrm>
           <a:prstGeom prst="rect">
             <a:avLst/>
@@ -10075,8 +10075,8 @@
         </p:nvSpPr>
         <p:spPr>
           <a:xfrm>
-            <a:off x="1344168" y="3177540"/>
-            <a:ext cx="388620" cy="388620"/>
+            <a:off x="1492758" y="3108960"/>
+            <a:ext cx="457200" cy="457200"/>
           </a:xfrm>
           <a:prstGeom prst="rect">
             <a:avLst/>
@@ -10100,8 +10100,8 @@
         </p:nvSpPr>
         <p:spPr>
           <a:xfrm>
-            <a:off x="1410233" y="3243605"/>
-            <a:ext cx="256489" cy="256489"/>
+            <a:off x="1570482" y="3186684"/>
+            <a:ext cx="301752" cy="301752"/>
           </a:xfrm>
           <a:prstGeom prst="ellipse">
             <a:avLst/>
@@ -10125,8 +10125,8 @@
         </p:nvSpPr>
         <p:spPr>
           <a:xfrm>
-            <a:off x="1732788" y="3177540"/>
-            <a:ext cx="388620" cy="388620"/>
+            <a:off x="1949958" y="3108960"/>
+            <a:ext cx="457200" cy="457200"/>
           </a:xfrm>
           <a:prstGeom prst="rect">
             <a:avLst/>
@@ -10150,8 +10150,8 @@
         </p:nvSpPr>
         <p:spPr>
           <a:xfrm>
-            <a:off x="1798853" y="3243605"/>
-            <a:ext cx="256489" cy="256489"/>
+            <a:off x="2027682" y="3186684"/>
+            <a:ext cx="301752" cy="301752"/>
           </a:xfrm>
           <a:prstGeom prst="ellipse">
             <a:avLst/>
@@ -10175,8 +10175,8 @@
         </p:nvSpPr>
         <p:spPr>
           <a:xfrm>
-            <a:off x="2121408" y="3177540"/>
-            <a:ext cx="388620" cy="388620"/>
+            <a:off x="2407158" y="3108960"/>
+            <a:ext cx="457200" cy="457200"/>
           </a:xfrm>
           <a:prstGeom prst="rect">
             <a:avLst/>
@@ -10200,8 +10200,8 @@
         </p:nvSpPr>
         <p:spPr>
           <a:xfrm>
-            <a:off x="2187473" y="3243605"/>
-            <a:ext cx="256489" cy="256489"/>
+            <a:off x="2484882" y="3186684"/>
+            <a:ext cx="301752" cy="301752"/>
           </a:xfrm>
           <a:prstGeom prst="ellipse">
             <a:avLst/>
@@ -10225,8 +10225,8 @@
         </p:nvSpPr>
         <p:spPr>
           <a:xfrm>
-            <a:off x="2510028" y="3177540"/>
-            <a:ext cx="388620" cy="388620"/>
+            <a:off x="2864358" y="3108960"/>
+            <a:ext cx="457200" cy="457200"/>
           </a:xfrm>
           <a:prstGeom prst="rect">
             <a:avLst/>
@@ -10250,8 +10250,8 @@
         </p:nvSpPr>
         <p:spPr>
           <a:xfrm>
-            <a:off x="2576093" y="3243605"/>
-            <a:ext cx="256489" cy="256489"/>
+            <a:off x="2942082" y="3186684"/>
+            <a:ext cx="301752" cy="301752"/>
           </a:xfrm>
           <a:prstGeom prst="ellipse">
             <a:avLst/>
@@ -10275,8 +10275,8 @@
         </p:nvSpPr>
         <p:spPr>
           <a:xfrm>
-            <a:off x="2898648" y="3177540"/>
-            <a:ext cx="388620" cy="388620"/>
+            <a:off x="3321558" y="3108960"/>
+            <a:ext cx="457200" cy="457200"/>
           </a:xfrm>
           <a:prstGeom prst="rect">
             <a:avLst/>
@@ -10300,8 +10300,8 @@
         </p:nvSpPr>
         <p:spPr>
           <a:xfrm>
-            <a:off x="2964713" y="3243605"/>
-            <a:ext cx="256489" cy="256489"/>
+            <a:off x="3399282" y="3186684"/>
+            <a:ext cx="301752" cy="301752"/>
           </a:xfrm>
           <a:prstGeom prst="ellipse">
             <a:avLst/>
@@ -10325,8 +10325,8 @@
         </p:nvSpPr>
         <p:spPr>
           <a:xfrm>
-            <a:off x="1344168" y="3566160"/>
-            <a:ext cx="388620" cy="388620"/>
+            <a:off x="1492758" y="3566160"/>
+            <a:ext cx="457200" cy="457200"/>
           </a:xfrm>
           <a:prstGeom prst="rect">
             <a:avLst/>
@@ -10350,8 +10350,8 @@
         </p:nvSpPr>
         <p:spPr>
           <a:xfrm>
-            <a:off x="1732788" y="3566160"/>
-            <a:ext cx="388620" cy="388620"/>
+            <a:off x="1949958" y="3566160"/>
+            <a:ext cx="457200" cy="457200"/>
           </a:xfrm>
           <a:prstGeom prst="rect">
             <a:avLst/>
@@ -10375,8 +10375,8 @@
         </p:nvSpPr>
         <p:spPr>
           <a:xfrm>
-            <a:off x="2121408" y="3566160"/>
-            <a:ext cx="388620" cy="388620"/>
+            <a:off x="2407158" y="3566160"/>
+            <a:ext cx="457200" cy="457200"/>
           </a:xfrm>
           <a:prstGeom prst="rect">
             <a:avLst/>
@@ -10400,8 +10400,8 @@
         </p:nvSpPr>
         <p:spPr>
           <a:xfrm>
-            <a:off x="2510028" y="3566160"/>
-            <a:ext cx="388620" cy="388620"/>
+            <a:off x="2864358" y="3566160"/>
+            <a:ext cx="457200" cy="457200"/>
           </a:xfrm>
           <a:prstGeom prst="rect">
             <a:avLst/>
@@ -10425,8 +10425,8 @@
         </p:nvSpPr>
         <p:spPr>
           <a:xfrm>
-            <a:off x="2898648" y="3566160"/>
-            <a:ext cx="388620" cy="388620"/>
+            <a:off x="3321558" y="3566160"/>
+            <a:ext cx="457200" cy="457200"/>
           </a:xfrm>
           <a:prstGeom prst="rect">
             <a:avLst/>
@@ -10450,8 +10450,8 @@
         </p:nvSpPr>
         <p:spPr>
           <a:xfrm>
-            <a:off x="1344168" y="3177540"/>
-            <a:ext cx="1943100" cy="777240"/>
+            <a:off x="1492758" y="3108960"/>
+            <a:ext cx="2286000" cy="914400"/>
           </a:xfrm>
           <a:prstGeom prst="rect">
             <a:avLst/>
@@ -10477,8 +10477,8 @@
         </p:nvSpPr>
         <p:spPr>
           <a:xfrm>
-            <a:off x="3607308" y="3177540"/>
-            <a:ext cx="388620" cy="388620"/>
+            <a:off x="4395978" y="3108960"/>
+            <a:ext cx="457200" cy="457200"/>
           </a:xfrm>
           <a:prstGeom prst="rect">
             <a:avLst/>
@@ -10502,8 +10502,8 @@
         </p:nvSpPr>
         <p:spPr>
           <a:xfrm>
-            <a:off x="3673373" y="3243605"/>
-            <a:ext cx="256489" cy="256489"/>
+            <a:off x="4473702" y="3186684"/>
+            <a:ext cx="301752" cy="301752"/>
           </a:xfrm>
           <a:prstGeom prst="ellipse">
             <a:avLst/>
@@ -10527,8 +10527,8 @@
         </p:nvSpPr>
         <p:spPr>
           <a:xfrm>
-            <a:off x="3995928" y="3177540"/>
-            <a:ext cx="388620" cy="388620"/>
+            <a:off x="4853178" y="3108960"/>
+            <a:ext cx="457200" cy="457200"/>
           </a:xfrm>
           <a:prstGeom prst="rect">
             <a:avLst/>
@@ -10552,8 +10552,8 @@
         </p:nvSpPr>
         <p:spPr>
           <a:xfrm>
-            <a:off x="4061993" y="3243605"/>
-            <a:ext cx="256489" cy="256489"/>
+            <a:off x="4930902" y="3186684"/>
+            <a:ext cx="301752" cy="301752"/>
           </a:xfrm>
           <a:prstGeom prst="ellipse">
             <a:avLst/>
@@ -10577,8 +10577,8 @@
         </p:nvSpPr>
         <p:spPr>
           <a:xfrm>
-            <a:off x="4384548" y="3177540"/>
-            <a:ext cx="388620" cy="388620"/>
+            <a:off x="5310378" y="3108960"/>
+            <a:ext cx="457200" cy="457200"/>
           </a:xfrm>
           <a:prstGeom prst="rect">
             <a:avLst/>
@@ -10602,8 +10602,8 @@
         </p:nvSpPr>
         <p:spPr>
           <a:xfrm>
-            <a:off x="4450613" y="3243605"/>
-            <a:ext cx="256489" cy="256489"/>
+            <a:off x="5388102" y="3186684"/>
+            <a:ext cx="301752" cy="301752"/>
           </a:xfrm>
           <a:prstGeom prst="ellipse">
             <a:avLst/>
@@ -10627,8 +10627,8 @@
         </p:nvSpPr>
         <p:spPr>
           <a:xfrm>
-            <a:off x="4773168" y="3177540"/>
-            <a:ext cx="388620" cy="388620"/>
+            <a:off x="5767578" y="3108960"/>
+            <a:ext cx="457200" cy="457200"/>
           </a:xfrm>
           <a:prstGeom prst="rect">
             <a:avLst/>
@@ -10652,8 +10652,8 @@
         </p:nvSpPr>
         <p:spPr>
           <a:xfrm>
-            <a:off x="5161788" y="3177540"/>
-            <a:ext cx="388620" cy="388620"/>
+            <a:off x="6224778" y="3108960"/>
+            <a:ext cx="457200" cy="457200"/>
           </a:xfrm>
           <a:prstGeom prst="rect">
             <a:avLst/>
@@ -10677,8 +10677,8 @@
         </p:nvSpPr>
         <p:spPr>
           <a:xfrm>
-            <a:off x="3607308" y="3566160"/>
-            <a:ext cx="388620" cy="388620"/>
+            <a:off x="4395978" y="3566160"/>
+            <a:ext cx="457200" cy="457200"/>
           </a:xfrm>
           <a:prstGeom prst="rect">
             <a:avLst/>
@@ -10702,8 +10702,8 @@
         </p:nvSpPr>
         <p:spPr>
           <a:xfrm>
-            <a:off x="3995928" y="3566160"/>
-            <a:ext cx="388620" cy="388620"/>
+            <a:off x="4853178" y="3566160"/>
+            <a:ext cx="457200" cy="457200"/>
           </a:xfrm>
           <a:prstGeom prst="rect">
             <a:avLst/>
@@ -10727,8 +10727,8 @@
         </p:nvSpPr>
         <p:spPr>
           <a:xfrm>
-            <a:off x="4384548" y="3566160"/>
-            <a:ext cx="388620" cy="388620"/>
+            <a:off x="5310378" y="3566160"/>
+            <a:ext cx="457200" cy="457200"/>
           </a:xfrm>
           <a:prstGeom prst="rect">
             <a:avLst/>
@@ -10752,8 +10752,8 @@
         </p:nvSpPr>
         <p:spPr>
           <a:xfrm>
-            <a:off x="4773168" y="3566160"/>
-            <a:ext cx="388620" cy="388620"/>
+            <a:off x="5767578" y="3566160"/>
+            <a:ext cx="457200" cy="457200"/>
           </a:xfrm>
           <a:prstGeom prst="rect">
             <a:avLst/>
@@ -10777,8 +10777,8 @@
         </p:nvSpPr>
         <p:spPr>
           <a:xfrm>
-            <a:off x="5161788" y="3566160"/>
-            <a:ext cx="388620" cy="388620"/>
+            <a:off x="6224778" y="3566160"/>
+            <a:ext cx="457200" cy="457200"/>
           </a:xfrm>
           <a:prstGeom prst="rect">
             <a:avLst/>
@@ -10802,8 +10802,8 @@
         </p:nvSpPr>
         <p:spPr>
           <a:xfrm>
-            <a:off x="3607308" y="3177540"/>
-            <a:ext cx="1943100" cy="777240"/>
+            <a:off x="4395978" y="3108960"/>
+            <a:ext cx="2286000" cy="914400"/>
           </a:xfrm>
           <a:prstGeom prst="rect">
             <a:avLst/>
@@ -10876,8 +10876,8 @@
         </p:nvSpPr>
         <p:spPr>
           <a:xfrm>
-            <a:off x="1344168" y="4274820"/>
-            <a:ext cx="388620" cy="388620"/>
+            <a:off x="1492758" y="4206240"/>
+            <a:ext cx="457200" cy="457200"/>
           </a:xfrm>
           <a:prstGeom prst="rect">
             <a:avLst/>
@@ -10901,8 +10901,8 @@
         </p:nvSpPr>
         <p:spPr>
           <a:xfrm>
-            <a:off x="1410233" y="4340885"/>
-            <a:ext cx="256489" cy="256489"/>
+            <a:off x="1570482" y="4283964"/>
+            <a:ext cx="301752" cy="301752"/>
           </a:xfrm>
           <a:prstGeom prst="ellipse">
             <a:avLst/>
@@ -10926,8 +10926,8 @@
         </p:nvSpPr>
         <p:spPr>
           <a:xfrm>
-            <a:off x="1732788" y="4274820"/>
-            <a:ext cx="388620" cy="388620"/>
+            <a:off x="1949958" y="4206240"/>
+            <a:ext cx="457200" cy="457200"/>
           </a:xfrm>
           <a:prstGeom prst="rect">
             <a:avLst/>
@@ -10951,8 +10951,8 @@
         </p:nvSpPr>
         <p:spPr>
           <a:xfrm>
-            <a:off x="2121408" y="4274820"/>
-            <a:ext cx="388620" cy="388620"/>
+            <a:off x="2407158" y="4206240"/>
+            <a:ext cx="457200" cy="457200"/>
           </a:xfrm>
           <a:prstGeom prst="rect">
             <a:avLst/>
@@ -10976,8 +10976,8 @@
         </p:nvSpPr>
         <p:spPr>
           <a:xfrm>
-            <a:off x="2510028" y="4274820"/>
-            <a:ext cx="388620" cy="388620"/>
+            <a:off x="2864358" y="4206240"/>
+            <a:ext cx="457200" cy="457200"/>
           </a:xfrm>
           <a:prstGeom prst="rect">
             <a:avLst/>
@@ -11001,8 +11001,8 @@
         </p:nvSpPr>
         <p:spPr>
           <a:xfrm>
-            <a:off x="2898648" y="4274820"/>
-            <a:ext cx="388620" cy="388620"/>
+            <a:off x="3321558" y="4206240"/>
+            <a:ext cx="457200" cy="457200"/>
           </a:xfrm>
           <a:prstGeom prst="rect">
             <a:avLst/>
@@ -11026,8 +11026,8 @@
         </p:nvSpPr>
         <p:spPr>
           <a:xfrm>
-            <a:off x="1344168" y="4663440"/>
-            <a:ext cx="388620" cy="388620"/>
+            <a:off x="1492758" y="4663440"/>
+            <a:ext cx="457200" cy="457200"/>
           </a:xfrm>
           <a:prstGeom prst="rect">
             <a:avLst/>
@@ -11051,8 +11051,8 @@
         </p:nvSpPr>
         <p:spPr>
           <a:xfrm>
-            <a:off x="1732788" y="4663440"/>
-            <a:ext cx="388620" cy="388620"/>
+            <a:off x="1949958" y="4663440"/>
+            <a:ext cx="457200" cy="457200"/>
           </a:xfrm>
           <a:prstGeom prst="rect">
             <a:avLst/>
@@ -11076,8 +11076,8 @@
         </p:nvSpPr>
         <p:spPr>
           <a:xfrm>
-            <a:off x="2121408" y="4663440"/>
-            <a:ext cx="388620" cy="388620"/>
+            <a:off x="2407158" y="4663440"/>
+            <a:ext cx="457200" cy="457200"/>
           </a:xfrm>
           <a:prstGeom prst="rect">
             <a:avLst/>
@@ -11101,8 +11101,8 @@
         </p:nvSpPr>
         <p:spPr>
           <a:xfrm>
-            <a:off x="2510028" y="4663440"/>
-            <a:ext cx="388620" cy="388620"/>
+            <a:off x="2864358" y="4663440"/>
+            <a:ext cx="457200" cy="457200"/>
           </a:xfrm>
           <a:prstGeom prst="rect">
             <a:avLst/>
@@ -11126,8 +11126,8 @@
         </p:nvSpPr>
         <p:spPr>
           <a:xfrm>
-            <a:off x="2898648" y="4663440"/>
-            <a:ext cx="388620" cy="388620"/>
+            <a:off x="3321558" y="4663440"/>
+            <a:ext cx="457200" cy="457200"/>
           </a:xfrm>
           <a:prstGeom prst="rect">
             <a:avLst/>
@@ -11151,8 +11151,8 @@
         </p:nvSpPr>
         <p:spPr>
           <a:xfrm>
-            <a:off x="1344168" y="4274820"/>
-            <a:ext cx="1943100" cy="777240"/>
+            <a:off x="1492758" y="4206240"/>
+            <a:ext cx="2286000" cy="914400"/>
           </a:xfrm>
           <a:prstGeom prst="rect">
             <a:avLst/>
@@ -11178,8 +11178,8 @@
         </p:nvSpPr>
         <p:spPr>
           <a:xfrm>
-            <a:off x="3607308" y="4274820"/>
-            <a:ext cx="388620" cy="388620"/>
+            <a:off x="4395978" y="4206240"/>
+            <a:ext cx="457200" cy="457200"/>
           </a:xfrm>
           <a:prstGeom prst="rect">
             <a:avLst/>
@@ -11203,8 +11203,8 @@
         </p:nvSpPr>
         <p:spPr>
           <a:xfrm>
-            <a:off x="3673373" y="4340885"/>
-            <a:ext cx="256489" cy="256489"/>
+            <a:off x="4473702" y="4283964"/>
+            <a:ext cx="301752" cy="301752"/>
           </a:xfrm>
           <a:prstGeom prst="ellipse">
             <a:avLst/>
@@ -11228,8 +11228,8 @@
         </p:nvSpPr>
         <p:spPr>
           <a:xfrm>
-            <a:off x="3995928" y="4274820"/>
-            <a:ext cx="388620" cy="388620"/>
+            <a:off x="4853178" y="4206240"/>
+            <a:ext cx="457200" cy="457200"/>
           </a:xfrm>
           <a:prstGeom prst="rect">
             <a:avLst/>
@@ -11253,8 +11253,8 @@
         </p:nvSpPr>
         <p:spPr>
           <a:xfrm>
-            <a:off x="4061993" y="4340885"/>
-            <a:ext cx="256489" cy="256489"/>
+            <a:off x="4930902" y="4283964"/>
+            <a:ext cx="301752" cy="301752"/>
           </a:xfrm>
           <a:prstGeom prst="ellipse">
             <a:avLst/>
@@ -11278,8 +11278,8 @@
         </p:nvSpPr>
         <p:spPr>
           <a:xfrm>
-            <a:off x="4384548" y="4274820"/>
-            <a:ext cx="388620" cy="388620"/>
+            <a:off x="5310378" y="4206240"/>
+            <a:ext cx="457200" cy="457200"/>
           </a:xfrm>
           <a:prstGeom prst="rect">
             <a:avLst/>
@@ -11303,8 +11303,8 @@
         </p:nvSpPr>
         <p:spPr>
           <a:xfrm>
-            <a:off x="4450613" y="4340885"/>
-            <a:ext cx="256489" cy="256489"/>
+            <a:off x="5388102" y="4283964"/>
+            <a:ext cx="301752" cy="301752"/>
           </a:xfrm>
           <a:prstGeom prst="ellipse">
             <a:avLst/>
@@ -11328,8 +11328,8 @@
         </p:nvSpPr>
         <p:spPr>
           <a:xfrm>
-            <a:off x="4773168" y="4274820"/>
-            <a:ext cx="388620" cy="388620"/>
+            <a:off x="5767578" y="4206240"/>
+            <a:ext cx="457200" cy="457200"/>
           </a:xfrm>
           <a:prstGeom prst="rect">
             <a:avLst/>
@@ -11353,8 +11353,8 @@
         </p:nvSpPr>
         <p:spPr>
           <a:xfrm>
-            <a:off x="4839233" y="4340885"/>
-            <a:ext cx="256489" cy="256489"/>
+            <a:off x="5845302" y="4283964"/>
+            <a:ext cx="301752" cy="301752"/>
           </a:xfrm>
           <a:prstGeom prst="ellipse">
             <a:avLst/>
@@ -11378,8 +11378,8 @@
         </p:nvSpPr>
         <p:spPr>
           <a:xfrm>
-            <a:off x="5161788" y="4274820"/>
-            <a:ext cx="388620" cy="388620"/>
+            <a:off x="6224778" y="4206240"/>
+            <a:ext cx="457200" cy="457200"/>
           </a:xfrm>
           <a:prstGeom prst="rect">
             <a:avLst/>
@@ -11403,8 +11403,8 @@
         </p:nvSpPr>
         <p:spPr>
           <a:xfrm>
-            <a:off x="5227853" y="4340885"/>
-            <a:ext cx="256489" cy="256489"/>
+            <a:off x="6302502" y="4283964"/>
+            <a:ext cx="301752" cy="301752"/>
           </a:xfrm>
           <a:prstGeom prst="ellipse">
             <a:avLst/>
@@ -11428,8 +11428,8 @@
         </p:nvSpPr>
         <p:spPr>
           <a:xfrm>
-            <a:off x="3607308" y="4663440"/>
-            <a:ext cx="388620" cy="388620"/>
+            <a:off x="4395978" y="4663440"/>
+            <a:ext cx="457200" cy="457200"/>
           </a:xfrm>
           <a:prstGeom prst="rect">
             <a:avLst/>
@@ -11453,8 +11453,8 @@
         </p:nvSpPr>
         <p:spPr>
           <a:xfrm>
-            <a:off x="3673373" y="4729505"/>
-            <a:ext cx="256489" cy="256489"/>
+            <a:off x="4473702" y="4741164"/>
+            <a:ext cx="301752" cy="301752"/>
           </a:xfrm>
           <a:prstGeom prst="ellipse">
             <a:avLst/>
@@ -11478,8 +11478,8 @@
         </p:nvSpPr>
         <p:spPr>
           <a:xfrm>
-            <a:off x="3995928" y="4663440"/>
-            <a:ext cx="388620" cy="388620"/>
+            <a:off x="4853178" y="4663440"/>
+            <a:ext cx="457200" cy="457200"/>
           </a:xfrm>
           <a:prstGeom prst="rect">
             <a:avLst/>
@@ -11503,8 +11503,8 @@
         </p:nvSpPr>
         <p:spPr>
           <a:xfrm>
-            <a:off x="4384548" y="4663440"/>
-            <a:ext cx="388620" cy="388620"/>
+            <a:off x="5310378" y="4663440"/>
+            <a:ext cx="457200" cy="457200"/>
           </a:xfrm>
           <a:prstGeom prst="rect">
             <a:avLst/>
@@ -11528,8 +11528,8 @@
         </p:nvSpPr>
         <p:spPr>
           <a:xfrm>
-            <a:off x="4773168" y="4663440"/>
-            <a:ext cx="388620" cy="388620"/>
+            <a:off x="5767578" y="4663440"/>
+            <a:ext cx="457200" cy="457200"/>
           </a:xfrm>
           <a:prstGeom prst="rect">
             <a:avLst/>
@@ -11553,8 +11553,8 @@
         </p:nvSpPr>
         <p:spPr>
           <a:xfrm>
-            <a:off x="5161788" y="4663440"/>
-            <a:ext cx="388620" cy="388620"/>
+            <a:off x="6224778" y="4663440"/>
+            <a:ext cx="457200" cy="457200"/>
           </a:xfrm>
           <a:prstGeom prst="rect">
             <a:avLst/>
@@ -11578,8 +11578,8 @@
         </p:nvSpPr>
         <p:spPr>
           <a:xfrm>
-            <a:off x="3607308" y="4274820"/>
-            <a:ext cx="1943100" cy="777240"/>
+            <a:off x="4395978" y="4206240"/>
+            <a:ext cx="2286000" cy="914400"/>
           </a:xfrm>
           <a:prstGeom prst="rect">
             <a:avLst/>

--- a/dist/초1/수학/수와연산/초1_수학_수와연산_04_덧셈의뜻.pptx
+++ b/dist/초1/수학/수와연산/초1_수학_수와연산_04_덧셈의뜻.pptx
@@ -120,13 +120,13 @@
   <p:extLst>
     <p:ext uri="{521415D9-36F7-43E2-AB2F-B90AF26B5E84}">
       <p14:sectionLst xmlns:p14="http://schemas.microsoft.com/office/powerpoint/2010/main">
-        <p14:section name="도입" id="{195ebcb9-cc14-32d7-b508-8fbd0d771756}">
+        <p14:section name="도입" id="{3e7b0fae-3815-b053-9c4f-da7064653478}">
           <p14:sldIdLst>
             <p14:sldId id="256"/>
             <p14:sldId id="257"/>
           </p14:sldIdLst>
         </p14:section>
-        <p14:section name="개념" id="{1eb864f4-6456-2fdf-cadb-a3ba49e36478}">
+        <p14:section name="개념" id="{57812954-552d-47b2-ff10-f1321c10a760}">
           <p14:sldIdLst>
             <p14:sldId id="258"/>
             <p14:sldId id="259"/>
@@ -134,26 +134,26 @@
             <p14:sldId id="261"/>
           </p14:sldIdLst>
         </p14:section>
-        <p14:section name="연습" id="{22862124-a2d7-0d22-e90e-f6413d78909e}">
+        <p14:section name="연습" id="{160f94fc-cc47-7ce6-7914-7075f0b6f7ae}">
           <p14:sldIdLst>
             <p14:sldId id="262"/>
             <p14:sldId id="263"/>
             <p14:sldId id="264"/>
           </p14:sldIdLst>
         </p14:section>
-        <p14:section name="확인" id="{4ebbff3f-de3d-534c-0d26-f409f73c6037}">
+        <p14:section name="확인" id="{54da5491-78e1-c594-8d70-c9894d0b4b87}">
           <p14:sldIdLst>
             <p14:sldId id="265"/>
             <p14:sldId id="266"/>
             <p14:sldId id="267"/>
           </p14:sldIdLst>
         </p14:section>
-        <p14:section name="정리" id="{ac155ba5-5e12-4d22-acac-d5adcc4c869c}">
+        <p14:section name="정리" id="{8359e463-c1ca-52fc-238b-d860535dfd4a}">
           <p14:sldIdLst>
             <p14:sldId id="268"/>
           </p14:sldIdLst>
         </p14:section>
-        <p14:section name="보충" id="{20e1275d-5f0b-43f9-0bea-67579eb4204b}">
+        <p14:section name="보충" id="{0a8d6576-2670-1060-4bb8-42f0413323aa}">
           <p14:sldIdLst>
             <p14:sldId id="269"/>
           </p14:sldIdLst>
@@ -8803,7 +8803,7 @@
         </p:nvSpPr>
         <p:spPr>
           <a:xfrm>
-            <a:off x="548640" y="3424428"/>
+            <a:off x="548640" y="3202940"/>
             <a:ext cx="548640" cy="548640"/>
           </a:xfrm>
           <a:prstGeom prst="ellipse">
@@ -8848,7 +8848,7 @@
         </p:nvSpPr>
         <p:spPr>
           <a:xfrm>
-            <a:off x="1325880" y="3424428"/>
+            <a:off x="1325880" y="3202940"/>
             <a:ext cx="4049420" cy="548640"/>
           </a:xfrm>
           <a:prstGeom prst="rect">
@@ -8887,7 +8887,7 @@
         </p:nvSpPr>
         <p:spPr>
           <a:xfrm>
-            <a:off x="548640" y="4137660"/>
+            <a:off x="548640" y="3961892"/>
             <a:ext cx="548640" cy="548640"/>
           </a:xfrm>
           <a:prstGeom prst="ellipse">
@@ -8932,8 +8932,8 @@
         </p:nvSpPr>
         <p:spPr>
           <a:xfrm>
-            <a:off x="1325880" y="4137660"/>
-            <a:ext cx="4049420" cy="548640"/>
+            <a:off x="1325880" y="3916172"/>
+            <a:ext cx="4049420" cy="991616"/>
           </a:xfrm>
           <a:prstGeom prst="rect">
             <a:avLst/>
@@ -8971,7 +8971,7 @@
         </p:nvSpPr>
         <p:spPr>
           <a:xfrm>
-            <a:off x="548640" y="4850892"/>
+            <a:off x="548640" y="5072380"/>
             <a:ext cx="548640" cy="548640"/>
           </a:xfrm>
           <a:prstGeom prst="ellipse">
@@ -9016,7 +9016,7 @@
         </p:nvSpPr>
         <p:spPr>
           <a:xfrm>
-            <a:off x="1325880" y="4850892"/>
+            <a:off x="1325880" y="5072380"/>
             <a:ext cx="4049420" cy="548640"/>
           </a:xfrm>
           <a:prstGeom prst="rect">
